--- a/slides/rule_based_tools.pptx
+++ b/slides/rule_based_tools.pptx
@@ -4,14 +4,14 @@
   <p:sldMasterIdLst>
     <p:sldMasterId id="2147483648" r:id="rId1"/>
   </p:sldMasterIdLst>
+  <p:notesMasterIdLst>
+    <p:notesMasterId r:id="rId5"/>
+  </p:notesMasterIdLst>
   <p:sldIdLst>
     <p:sldId id="256" r:id="rId2"/>
     <p:sldId id="257" r:id="rId3"/>
     <p:sldId id="258" r:id="rId4"/>
   </p:sldIdLst>
-  <p:notesMasterIdLst>
-    <p:notesMasterId r:id="rId5"/>
-  </p:notesMasterIdLst>
   <p:sldSz cx="12192000" cy="6858000"/>
   <p:notesSz cx="6858000" cy="12192000"/>
   <p:defaultTextStyle>
@@ -106,6 +106,11 @@
       </a:defRPr>
     </a:lvl9pPr>
   </p:defaultTextStyle>
+  <p:extLst>
+    <p:ext uri="{EFAFB233-063F-42B5-8137-9DF3F51BA10A}">
+      <p15:sldGuideLst xmlns:p15="http://schemas.microsoft.com/office/powerpoint/2012/main"/>
+    </p:ext>
+  </p:extLst>
 </p:presentation>
 </file>
 
@@ -131,234 +136,10 @@
           <a:chExt cx="0" cy="0"/>
         </a:xfrm>
       </p:grpSpPr>
-      <p:sp>
-        <p:nvSpPr>
-          <p:cNvPr id="2" name="Header Placeholder 1"/>
-          <p:cNvSpPr>
-            <a:spLocks noGrp="1"/>
-          </p:cNvSpPr>
-          <p:nvPr>
-            <p:ph type="hdr" sz="quarter"/>
-          </p:nvPr>
-        </p:nvSpPr>
-        <p:spPr>
-          <a:xfrm>
-            <a:off x="0" y="0"/>
-            <a:ext cx="2971800" cy="458788"/>
-          </a:xfrm>
-          <a:prstGeom prst="rect">
-            <a:avLst/>
-          </a:prstGeom>
-        </p:spPr>
-        <p:txBody>
-          <a:bodyPr vert="horz" lIns="91440" tIns="45720" rIns="91440" bIns="45720" rtlCol="0"/>
-          <a:lstStyle>
-            <a:lvl1pPr algn="l">
-              <a:defRPr sz="1200"/>
-            </a:lvl1pPr>
-          </a:lstStyle>
-          <a:p>
-            <a:endParaRPr lang="en-US"/>
-          </a:p>
-        </p:txBody>
-      </p:sp>
-      <p:sp>
-        <p:nvSpPr>
-          <p:cNvPr id="3" name="Date Placeholder 2"/>
-          <p:cNvSpPr>
-            <a:spLocks noGrp="1"/>
-          </p:cNvSpPr>
-          <p:nvPr>
-            <p:ph type="dt" idx="1"/>
-          </p:nvPr>
-        </p:nvSpPr>
-        <p:spPr>
-          <a:xfrm>
-            <a:off x="3884613" y="0"/>
-            <a:ext cx="2971800" cy="458788"/>
-          </a:xfrm>
-          <a:prstGeom prst="rect">
-            <a:avLst/>
-          </a:prstGeom>
-        </p:spPr>
-        <p:txBody>
-          <a:bodyPr vert="horz" lIns="91440" tIns="45720" rIns="91440" bIns="45720" rtlCol="0"/>
-          <a:lstStyle>
-            <a:lvl1pPr algn="r">
-              <a:defRPr sz="1200"/>
-            </a:lvl1pPr>
-          </a:lstStyle>
-          <a:p>
-            <a:fld id="{5282F153-3F37-0F45-9E97-73ACFA13230C}" type="datetimeFigureOut">
-              <a:rPr lang="en-US"/>
-              <a:t>7/23/19</a:t>
-            </a:fld>
-            <a:endParaRPr lang="en-US"/>
-          </a:p>
-        </p:txBody>
-      </p:sp>
-      <p:sp>
-        <p:nvSpPr>
-          <p:cNvPr id="4" name="Slide Image Placeholder 3"/>
-          <p:cNvSpPr>
-            <a:spLocks noGrp="1" noRot="1" noChangeAspect="1"/>
-          </p:cNvSpPr>
-          <p:nvPr>
-            <p:ph type="sldImg" idx="2"/>
-          </p:nvPr>
-        </p:nvSpPr>
-        <p:spPr>
-          <a:xfrm>
-            <a:off x="685800" y="1143000"/>
-            <a:ext cx="5486400" cy="3086100"/>
-          </a:xfrm>
-          <a:prstGeom prst="rect">
-            <a:avLst/>
-          </a:prstGeom>
-          <a:noFill/>
-          <a:ln w="12700">
-            <a:solidFill>
-              <a:prstClr val="black"/>
-            </a:solidFill>
-          </a:ln>
-        </p:spPr>
-        <p:txBody>
-          <a:bodyPr vert="horz" lIns="91440" tIns="45720" rIns="91440" bIns="45720" rtlCol="0" anchor="ctr"/>
-          <a:lstStyle/>
-          <a:p>
-            <a:endParaRPr lang="en-US"/>
-          </a:p>
-        </p:txBody>
-      </p:sp>
-      <p:sp>
-        <p:nvSpPr>
-          <p:cNvPr id="5" name="Notes Placeholder 4"/>
-          <p:cNvSpPr>
-            <a:spLocks noGrp="1"/>
-          </p:cNvSpPr>
-          <p:nvPr>
-            <p:ph type="body" sz="quarter" idx="3"/>
-          </p:nvPr>
-        </p:nvSpPr>
-        <p:spPr>
-          <a:xfrm>
-            <a:off x="685800" y="4400550"/>
-            <a:ext cx="5486400" cy="3600450"/>
-          </a:xfrm>
-          <a:prstGeom prst="rect">
-            <a:avLst/>
-          </a:prstGeom>
-        </p:spPr>
-        <p:txBody>
-          <a:bodyPr vert="horz" lIns="91440" tIns="45720" rIns="91440" bIns="45720" rtlCol="0"/>
-          <a:lstStyle/>
-          <a:p>
-            <a:pPr lvl="0"/>
-            <a:r>
-              <a:rPr lang="en-US"/>
-              <a:t>Click to edit Master text styles</a:t>
-            </a:r>
-          </a:p>
-          <a:p>
-            <a:pPr lvl="1"/>
-            <a:r>
-              <a:rPr lang="en-US"/>
-              <a:t>Second level</a:t>
-            </a:r>
-          </a:p>
-          <a:p>
-            <a:pPr lvl="2"/>
-            <a:r>
-              <a:rPr lang="en-US"/>
-              <a:t>Third level</a:t>
-            </a:r>
-          </a:p>
-          <a:p>
-            <a:pPr lvl="3"/>
-            <a:r>
-              <a:rPr lang="en-US"/>
-              <a:t>Fourth level</a:t>
-            </a:r>
-          </a:p>
-          <a:p>
-            <a:pPr lvl="4"/>
-            <a:r>
-              <a:rPr lang="en-US"/>
-              <a:t>Fifth level</a:t>
-            </a:r>
-          </a:p>
-        </p:txBody>
-      </p:sp>
-      <p:sp>
-        <p:nvSpPr>
-          <p:cNvPr id="6" name="Footer Placeholder 5"/>
-          <p:cNvSpPr>
-            <a:spLocks noGrp="1"/>
-          </p:cNvSpPr>
-          <p:nvPr>
-            <p:ph type="ftr" sz="quarter" idx="4"/>
-          </p:nvPr>
-        </p:nvSpPr>
-        <p:spPr>
-          <a:xfrm>
-            <a:off x="0" y="8685213"/>
-            <a:ext cx="2971800" cy="458787"/>
-          </a:xfrm>
-          <a:prstGeom prst="rect">
-            <a:avLst/>
-          </a:prstGeom>
-        </p:spPr>
-        <p:txBody>
-          <a:bodyPr vert="horz" lIns="91440" tIns="45720" rIns="91440" bIns="45720" rtlCol="0" anchor="b"/>
-          <a:lstStyle>
-            <a:lvl1pPr algn="l">
-              <a:defRPr sz="1200"/>
-            </a:lvl1pPr>
-          </a:lstStyle>
-          <a:p>
-            <a:endParaRPr lang="en-US"/>
-          </a:p>
-        </p:txBody>
-      </p:sp>
-      <p:sp>
-        <p:nvSpPr>
-          <p:cNvPr id="7" name="Slide Number Placeholder 6"/>
-          <p:cNvSpPr>
-            <a:spLocks noGrp="1"/>
-          </p:cNvSpPr>
-          <p:nvPr>
-            <p:ph type="sldNum" sz="quarter" idx="5"/>
-          </p:nvPr>
-        </p:nvSpPr>
-        <p:spPr>
-          <a:xfrm>
-            <a:off x="3884613" y="8685213"/>
-            <a:ext cx="2971800" cy="458787"/>
-          </a:xfrm>
-          <a:prstGeom prst="rect">
-            <a:avLst/>
-          </a:prstGeom>
-        </p:spPr>
-        <p:txBody>
-          <a:bodyPr vert="horz" lIns="91440" tIns="45720" rIns="91440" bIns="45720" rtlCol="0" anchor="b"/>
-          <a:lstStyle>
-            <a:lvl1pPr algn="r">
-              <a:defRPr sz="1200"/>
-            </a:lvl1pPr>
-          </a:lstStyle>
-          <a:p>
-            <a:fld id="{CE5E9CC1-C706-0F49-92D6-E571CC5EEA8F}" type="slidenum">
-              <a:rPr lang="en-US"/>
-              <a:t>‹#›</a:t>
-            </a:fld>
-            <a:endParaRPr lang="en-US"/>
-          </a:p>
-        </p:txBody>
-      </p:sp>
     </p:spTree>
     <p:extLst>
       <p:ext uri="{BB962C8B-B14F-4D97-AF65-F5344CB8AC3E}">
-        <p14:creationId xmlns:p14="http://schemas.microsoft.com/office/powerpoint/2010/main" val="1024086991"/>
+        <p14:creationId xmlns:p14="http://schemas.microsoft.com/office/powerpoint/2010/main" val="2913004650"/>
       </p:ext>
     </p:extLst>
   </p:cSld>
@@ -502,10 +283,6 @@
           <a:bodyPr/>
           <a:lstStyle/>
           <a:p>
-            <a:r>
-              <a:rPr lang="en-US" dirty="0"/>
-              <a:t/>
-            </a:r>
             <a:endParaRPr lang="en-US" dirty="0"/>
           </a:p>
         </p:txBody>
@@ -590,10 +367,6 @@
           <a:bodyPr/>
           <a:lstStyle/>
           <a:p>
-            <a:r>
-              <a:rPr lang="en-US" dirty="0"/>
-              <a:t/>
-            </a:r>
             <a:endParaRPr lang="en-US" dirty="0"/>
           </a:p>
         </p:txBody>
@@ -678,10 +451,6 @@
           <a:bodyPr/>
           <a:lstStyle/>
           <a:p>
-            <a:r>
-              <a:rPr lang="en-US" dirty="0"/>
-              <a:t/>
-            </a:r>
             <a:endParaRPr lang="en-US" dirty="0"/>
           </a:p>
         </p:txBody>
@@ -755,6 +524,11 @@
 <file path=ppt/slideMasters/slideMaster1.xml><?xml version="1.0" encoding="utf-8"?>
 <p:sldMaster xmlns:a="http://schemas.openxmlformats.org/drawingml/2006/main" xmlns:r="http://schemas.openxmlformats.org/officeDocument/2006/relationships" xmlns:p="http://schemas.openxmlformats.org/presentationml/2006/main">
   <p:cSld>
+    <p:bg>
+      <p:bgRef idx="1001">
+        <a:schemeClr val="bg1"/>
+      </p:bgRef>
+    </p:bg>
     <p:spTree>
       <p:nvGrpSpPr>
         <p:cNvPr id="1" name=""/>
@@ -1037,6 +811,7 @@
         <a:solidFill>
           <a:srgbClr val="FFFFFF"/>
         </a:solidFill>
+        <a:effectLst/>
       </p:bgPr>
     </p:bg>
     <p:spTree>
@@ -1074,7 +849,7 @@
           <a:bodyPr wrap="square" lIns="0" tIns="0" rIns="0" bIns="0" rtlCol="0" anchor="ctr"/>
           <a:lstStyle/>
           <a:p>
-            <a:pPr algn="l" indent="0" marL="0">
+            <a:pPr marL="0" indent="0" algn="l">
               <a:buNone/>
             </a:pPr>
             <a:r>
@@ -1113,7 +888,7 @@
           <a:bodyPr wrap="square" lIns="0" tIns="0" rIns="0" bIns="0" rtlCol="0" anchor="ctr"/>
           <a:lstStyle/>
           <a:p>
-            <a:pPr algn="l" indent="0" marL="0">
+            <a:pPr marL="0" indent="0" algn="l">
               <a:buNone/>
             </a:pPr>
             <a:r>
@@ -1133,30 +908,48 @@
       </p:sp>
       <p:graphicFrame>
         <p:nvGraphicFramePr>
-          <p:cNvPr id="2" name="Table 0"/>
+          <p:cNvPr id="4" name="Table 0"/>
           <p:cNvGraphicFramePr>
             <a:graphicFrameLocks noGrp="1"/>
           </p:cNvGraphicFramePr>
           <p:nvPr>
             <p:extLst>
               <p:ext uri="{D42A27DB-BD31-4B8C-83A1-F6EECF244321}">
-                <p14:modId xmlns:p14="http://schemas.microsoft.com/office/powerpoint/2010/main" val="1579011935"/>
+                <p14:modId xmlns:p14="http://schemas.microsoft.com/office/powerpoint/2010/main" val="2834866970"/>
               </p:ext>
             </p:extLst>
           </p:nvPr>
         </p:nvGraphicFramePr>
         <p:xfrm>
           <a:off x="457200" y="1325880"/>
-          <a:ext cx="11247120" cy="914400"/>
+          <a:ext cx="11247120" cy="5029200"/>
         </p:xfrm>
         <a:graphic>
           <a:graphicData uri="http://schemas.openxmlformats.org/drawingml/2006/table">
             <a:tbl>
               <a:tblPr/>
               <a:tblGrid>
-                <a:gridCol w="2651760"/>
-                <a:gridCol w="2011680"/>
-                <a:gridCol w="6583680"/>
+                <a:gridCol w="2651760">
+                  <a:extLst>
+                    <a:ext uri="{9D8B030D-6E8A-4147-A177-3AD203B41FA5}">
+                      <a16:colId xmlns:a16="http://schemas.microsoft.com/office/drawing/2014/main" val="20000"/>
+                    </a:ext>
+                  </a:extLst>
+                </a:gridCol>
+                <a:gridCol w="2011680">
+                  <a:extLst>
+                    <a:ext uri="{9D8B030D-6E8A-4147-A177-3AD203B41FA5}">
+                      <a16:colId xmlns:a16="http://schemas.microsoft.com/office/drawing/2014/main" val="20001"/>
+                    </a:ext>
+                  </a:extLst>
+                </a:gridCol>
+                <a:gridCol w="6583680">
+                  <a:extLst>
+                    <a:ext uri="{9D8B030D-6E8A-4147-A177-3AD203B41FA5}">
+                      <a16:colId xmlns:a16="http://schemas.microsoft.com/office/drawing/2014/main" val="20002"/>
+                    </a:ext>
+                  </a:extLst>
+                </a:gridCol>
               </a:tblGrid>
               <a:tr h="457200">
                 <a:tc>
@@ -1164,7 +957,7 @@
                     <a:bodyPr/>
                     <a:lstStyle/>
                     <a:p>
-                      <a:pPr algn="l" indent="0" marL="0">
+                      <a:pPr marL="0" indent="0" algn="l">
                         <a:buNone/>
                       </a:pPr>
                       <a:r>
@@ -1232,7 +1025,7 @@
                     <a:bodyPr/>
                     <a:lstStyle/>
                     <a:p>
-                      <a:pPr algn="l" indent="0" marL="0">
+                      <a:pPr marL="0" indent="0" algn="l">
                         <a:buNone/>
                       </a:pPr>
                       <a:r>
@@ -1300,7 +1093,7 @@
                     <a:bodyPr/>
                     <a:lstStyle/>
                     <a:p>
-                      <a:pPr algn="l" indent="0" marL="0">
+                      <a:pPr marL="0" indent="0" algn="l">
                         <a:buNone/>
                       </a:pPr>
                       <a:r>
@@ -1363,6 +1156,11 @@
                     </a:solidFill>
                   </a:tcPr>
                 </a:tc>
+                <a:extLst>
+                  <a:ext uri="{0D108BD9-81ED-4DB2-BD59-A6C34878D82A}">
+                    <a16:rowId xmlns:a16="http://schemas.microsoft.com/office/drawing/2014/main" val="10000"/>
+                  </a:ext>
+                </a:extLst>
               </a:tr>
               <a:tr h="457200">
                 <a:tc>
@@ -1370,7 +1168,7 @@
                     <a:bodyPr/>
                     <a:lstStyle/>
                     <a:p>
-                      <a:pPr algn="l" indent="0" marL="0">
+                      <a:pPr marL="0" indent="0" algn="l">
                         <a:buNone/>
                       </a:pPr>
                       <a:r>
@@ -1438,7 +1236,7 @@
                     <a:bodyPr/>
                     <a:lstStyle/>
                     <a:p>
-                      <a:pPr algn="l" indent="0" marL="0">
+                      <a:pPr marL="0" indent="0" algn="l">
                         <a:buNone/>
                       </a:pPr>
                       <a:r>
@@ -1450,7 +1248,7 @@
                           <a:ea typeface="Calibri" pitchFamily="34" charset="-122"/>
                           <a:cs typeface="Calibri" pitchFamily="34" charset="-120"/>
                         </a:rPr>
-                        <a:t>BNGL import</a:t>
+                        <a:t>BNGL</a:t>
                       </a:r>
                       <a:endParaRPr lang="en-US" sz="1300" dirty="0">
                         <a:latin typeface="Calibri" charset="0"/>
@@ -1506,7 +1304,7 @@
                     <a:bodyPr/>
                     <a:lstStyle/>
                     <a:p>
-                      <a:pPr algn="l" indent="0" marL="0">
+                      <a:pPr marL="0" indent="0" algn="l">
                         <a:buNone/>
                       </a:pPr>
                       <a:r>
@@ -1569,6 +1367,11 @@
                     </a:solidFill>
                   </a:tcPr>
                 </a:tc>
+                <a:extLst>
+                  <a:ext uri="{0D108BD9-81ED-4DB2-BD59-A6C34878D82A}">
+                    <a16:rowId xmlns:a16="http://schemas.microsoft.com/office/drawing/2014/main" val="10001"/>
+                  </a:ext>
+                </a:extLst>
               </a:tr>
               <a:tr h="457200">
                 <a:tc>
@@ -1576,7 +1379,7 @@
                     <a:bodyPr/>
                     <a:lstStyle/>
                     <a:p>
-                      <a:pPr algn="l" indent="0" marL="0">
+                      <a:pPr marL="0" indent="0" algn="l">
                         <a:buNone/>
                       </a:pPr>
                       <a:r>
@@ -1588,7 +1391,7 @@
                           <a:ea typeface="Calibri" pitchFamily="34" charset="-122"/>
                           <a:cs typeface="Calibri" pitchFamily="34" charset="-120"/>
                         </a:rPr>
-                        <a:t>Smoldyn</a:t>
+                        <a:t>MolClustPy</a:t>
                       </a:r>
                       <a:endParaRPr lang="en-US" sz="1300" dirty="0">
                         <a:latin typeface="Calibri" charset="0"/>
@@ -1644,7 +1447,7 @@
                     <a:bodyPr/>
                     <a:lstStyle/>
                     <a:p>
-                      <a:pPr algn="l" indent="0" marL="0">
+                      <a:pPr marL="0" indent="0" algn="l">
                         <a:buNone/>
                       </a:pPr>
                       <a:r>
@@ -1656,7 +1459,7 @@
                           <a:ea typeface="Calibri" pitchFamily="34" charset="-122"/>
                           <a:cs typeface="Calibri" pitchFamily="34" charset="-120"/>
                         </a:rPr>
-                        <a:t>BNGL</a:t>
+                        <a:t>NFsim</a:t>
                       </a:r>
                       <a:endParaRPr lang="en-US" sz="1300" dirty="0">
                         <a:latin typeface="Calibri" charset="0"/>
@@ -1712,7 +1515,7 @@
                     <a:bodyPr/>
                     <a:lstStyle/>
                     <a:p>
-                      <a:pPr algn="l" indent="0" marL="0">
+                      <a:pPr marL="0" indent="0" algn="l">
                         <a:buNone/>
                       </a:pPr>
                       <a:r>
@@ -1724,7 +1527,7 @@
                           <a:ea typeface="Calibri" pitchFamily="34" charset="-122"/>
                           <a:cs typeface="Calibri" pitchFamily="34" charset="-120"/>
                         </a:rPr>
-                        <a:t>Spatial particle simulator that reads BNGL</a:t>
+                        <a:t>Molecular cluster analysis over NFsim runs</a:t>
                       </a:r>
                       <a:endParaRPr lang="en-US" sz="1300" dirty="0">
                         <a:latin typeface="Calibri" charset="0"/>
@@ -1775,6 +1578,11 @@
                     </a:solidFill>
                   </a:tcPr>
                 </a:tc>
+                <a:extLst>
+                  <a:ext uri="{0D108BD9-81ED-4DB2-BD59-A6C34878D82A}">
+                    <a16:rowId xmlns:a16="http://schemas.microsoft.com/office/drawing/2014/main" val="1864311448"/>
+                  </a:ext>
+                </a:extLst>
               </a:tr>
               <a:tr h="457200">
                 <a:tc>
@@ -1782,205 +1590,207 @@
                     <a:bodyPr/>
                     <a:lstStyle/>
                     <a:p>
-                      <a:pPr algn="l" indent="0" marL="0">
-                        <a:buNone/>
-                      </a:pPr>
-                      <a:r>
-                        <a:rPr lang="en-US" sz="1300" b="1" dirty="0">
-                          <a:solidFill>
-                            <a:srgbClr val="000000"/>
-                          </a:solidFill>
-                          <a:latin typeface="Calibri" pitchFamily="34" charset="0"/>
-                          <a:ea typeface="Calibri" pitchFamily="34" charset="-122"/>
-                          <a:cs typeface="Calibri" pitchFamily="34" charset="-120"/>
-                        </a:rPr>
-                        <a:t>SRSim</a:t>
-                      </a:r>
-                      <a:endParaRPr lang="en-US" sz="1300" dirty="0">
-                        <a:latin typeface="Calibri" charset="0"/>
-                        <a:ea typeface="Calibri" charset="0"/>
-                        <a:cs typeface="Calibri" charset="0"/>
-                      </a:endParaRPr>
-                    </a:p>
-                  </a:txBody>
-                  <a:tcPr marL="50800" marR="50800" marT="12700" marB="12700" anchor="ctr">
-                    <a:lnL w="6350" cap="flat" cmpd="sng" algn="ctr">
-                      <a:solidFill>
-                        <a:srgbClr val="BFBFBF"/>
-                      </a:solidFill>
-                      <a:prstDash val="solid"/>
-                      <a:round/>
-                      <a:headEnd type="none" w="med" len="med"/>
-                      <a:tailEnd type="none" w="med" len="med"/>
-                    </a:lnL>
-                    <a:lnR w="6350" cap="flat" cmpd="sng" algn="ctr">
-                      <a:solidFill>
-                        <a:srgbClr val="BFBFBF"/>
-                      </a:solidFill>
-                      <a:prstDash val="solid"/>
-                      <a:round/>
-                      <a:headEnd type="none" w="med" len="med"/>
-                      <a:tailEnd type="none" w="med" len="med"/>
-                    </a:lnR>
-                    <a:lnT w="6350" cap="flat" cmpd="sng" algn="ctr">
-                      <a:solidFill>
-                        <a:srgbClr val="BFBFBF"/>
-                      </a:solidFill>
-                      <a:prstDash val="solid"/>
-                      <a:round/>
-                      <a:headEnd type="none" w="med" len="med"/>
-                      <a:tailEnd type="none" w="med" len="med"/>
-                    </a:lnT>
-                    <a:lnB w="6350" cap="flat" cmpd="sng" algn="ctr">
-                      <a:solidFill>
-                        <a:srgbClr val="BFBFBF"/>
-                      </a:solidFill>
-                      <a:prstDash val="solid"/>
-                      <a:round/>
-                      <a:headEnd type="none" w="med" len="med"/>
-                      <a:tailEnd type="none" w="med" len="med"/>
-                    </a:lnB>
-                    <a:solidFill>
-                      <a:srgbClr val="FFFFFF"/>
-                    </a:solidFill>
-                  </a:tcPr>
-                </a:tc>
-                <a:tc>
-                  <a:txBody>
-                    <a:bodyPr/>
-                    <a:lstStyle/>
-                    <a:p>
-                      <a:pPr algn="l" indent="0" marL="0">
+                      <a:pPr marL="0" indent="0" algn="l">
+                        <a:buNone/>
+                      </a:pPr>
+                      <a:r>
+                        <a:rPr lang="en-US" sz="1300" b="1" dirty="0" err="1">
+                          <a:latin typeface="Calibri" charset="0"/>
+                          <a:ea typeface="Calibri" charset="0"/>
+                          <a:cs typeface="Calibri" charset="0"/>
+                        </a:rPr>
+                        <a:t>bnglViz</a:t>
+                      </a:r>
+                      <a:endParaRPr lang="en-US" sz="1300" b="1" dirty="0">
+                        <a:latin typeface="Calibri" charset="0"/>
+                        <a:ea typeface="Calibri" charset="0"/>
+                        <a:cs typeface="Calibri" charset="0"/>
+                      </a:endParaRPr>
+                    </a:p>
+                  </a:txBody>
+                  <a:tcPr marL="50800" marR="50800" marT="12700" marB="12700" anchor="ctr">
+                    <a:lnL w="6350" cap="flat" cmpd="sng" algn="ctr">
+                      <a:solidFill>
+                        <a:srgbClr val="BFBFBF"/>
+                      </a:solidFill>
+                      <a:prstDash val="solid"/>
+                      <a:round/>
+                      <a:headEnd type="none" w="med" len="med"/>
+                      <a:tailEnd type="none" w="med" len="med"/>
+                    </a:lnL>
+                    <a:lnR w="6350" cap="flat" cmpd="sng" algn="ctr">
+                      <a:solidFill>
+                        <a:srgbClr val="BFBFBF"/>
+                      </a:solidFill>
+                      <a:prstDash val="solid"/>
+                      <a:round/>
+                      <a:headEnd type="none" w="med" len="med"/>
+                      <a:tailEnd type="none" w="med" len="med"/>
+                    </a:lnR>
+                    <a:lnT w="6350" cap="flat" cmpd="sng" algn="ctr">
+                      <a:solidFill>
+                        <a:srgbClr val="BFBFBF"/>
+                      </a:solidFill>
+                      <a:prstDash val="solid"/>
+                      <a:round/>
+                      <a:headEnd type="none" w="med" len="med"/>
+                      <a:tailEnd type="none" w="med" len="med"/>
+                    </a:lnT>
+                    <a:lnB w="6350" cap="flat" cmpd="sng" algn="ctr">
+                      <a:solidFill>
+                        <a:srgbClr val="BFBFBF"/>
+                      </a:solidFill>
+                      <a:prstDash val="solid"/>
+                      <a:round/>
+                      <a:headEnd type="none" w="med" len="med"/>
+                      <a:tailEnd type="none" w="med" len="med"/>
+                    </a:lnB>
+                    <a:solidFill>
+                      <a:srgbClr val="FFFFFF"/>
+                    </a:solidFill>
+                  </a:tcPr>
+                </a:tc>
+                <a:tc>
+                  <a:txBody>
+                    <a:bodyPr/>
+                    <a:lstStyle/>
+                    <a:p>
+                      <a:pPr marL="0" indent="0" algn="l">
                         <a:buNone/>
                       </a:pPr>
                       <a:r>
                         <a:rPr lang="en-US" sz="1300" dirty="0">
-                          <a:solidFill>
-                            <a:srgbClr val="000000"/>
-                          </a:solidFill>
-                          <a:latin typeface="Calibri" pitchFamily="34" charset="0"/>
-                          <a:ea typeface="Calibri" pitchFamily="34" charset="-122"/>
-                          <a:cs typeface="Calibri" pitchFamily="34" charset="-120"/>
+                          <a:latin typeface="Calibri" charset="0"/>
+                          <a:ea typeface="Calibri" charset="0"/>
+                          <a:cs typeface="Calibri" charset="0"/>
                         </a:rPr>
                         <a:t>BNGL</a:t>
                       </a:r>
-                      <a:endParaRPr lang="en-US" sz="1300" dirty="0">
-                        <a:latin typeface="Calibri" charset="0"/>
-                        <a:ea typeface="Calibri" charset="0"/>
-                        <a:cs typeface="Calibri" charset="0"/>
-                      </a:endParaRPr>
-                    </a:p>
-                  </a:txBody>
-                  <a:tcPr marL="50800" marR="50800" marT="12700" marB="12700" anchor="ctr">
-                    <a:lnL w="6350" cap="flat" cmpd="sng" algn="ctr">
-                      <a:solidFill>
-                        <a:srgbClr val="BFBFBF"/>
-                      </a:solidFill>
-                      <a:prstDash val="solid"/>
-                      <a:round/>
-                      <a:headEnd type="none" w="med" len="med"/>
-                      <a:tailEnd type="none" w="med" len="med"/>
-                    </a:lnL>
-                    <a:lnR w="6350" cap="flat" cmpd="sng" algn="ctr">
-                      <a:solidFill>
-                        <a:srgbClr val="BFBFBF"/>
-                      </a:solidFill>
-                      <a:prstDash val="solid"/>
-                      <a:round/>
-                      <a:headEnd type="none" w="med" len="med"/>
-                      <a:tailEnd type="none" w="med" len="med"/>
-                    </a:lnR>
-                    <a:lnT w="6350" cap="flat" cmpd="sng" algn="ctr">
-                      <a:solidFill>
-                        <a:srgbClr val="BFBFBF"/>
-                      </a:solidFill>
-                      <a:prstDash val="solid"/>
-                      <a:round/>
-                      <a:headEnd type="none" w="med" len="med"/>
-                      <a:tailEnd type="none" w="med" len="med"/>
-                    </a:lnT>
-                    <a:lnB w="6350" cap="flat" cmpd="sng" algn="ctr">
-                      <a:solidFill>
-                        <a:srgbClr val="BFBFBF"/>
-                      </a:solidFill>
-                      <a:prstDash val="solid"/>
-                      <a:round/>
-                      <a:headEnd type="none" w="med" len="med"/>
-                      <a:tailEnd type="none" w="med" len="med"/>
-                    </a:lnB>
-                    <a:solidFill>
-                      <a:srgbClr val="FFFFFF"/>
-                    </a:solidFill>
-                  </a:tcPr>
-                </a:tc>
-                <a:tc>
-                  <a:txBody>
-                    <a:bodyPr/>
-                    <a:lstStyle/>
-                    <a:p>
-                      <a:pPr algn="l" indent="0" marL="0">
+                    </a:p>
+                  </a:txBody>
+                  <a:tcPr marL="50800" marR="50800" marT="12700" marB="12700" anchor="ctr">
+                    <a:lnL w="6350" cap="flat" cmpd="sng" algn="ctr">
+                      <a:solidFill>
+                        <a:srgbClr val="BFBFBF"/>
+                      </a:solidFill>
+                      <a:prstDash val="solid"/>
+                      <a:round/>
+                      <a:headEnd type="none" w="med" len="med"/>
+                      <a:tailEnd type="none" w="med" len="med"/>
+                    </a:lnL>
+                    <a:lnR w="6350" cap="flat" cmpd="sng" algn="ctr">
+                      <a:solidFill>
+                        <a:srgbClr val="BFBFBF"/>
+                      </a:solidFill>
+                      <a:prstDash val="solid"/>
+                      <a:round/>
+                      <a:headEnd type="none" w="med" len="med"/>
+                      <a:tailEnd type="none" w="med" len="med"/>
+                    </a:lnR>
+                    <a:lnT w="6350" cap="flat" cmpd="sng" algn="ctr">
+                      <a:solidFill>
+                        <a:srgbClr val="BFBFBF"/>
+                      </a:solidFill>
+                      <a:prstDash val="solid"/>
+                      <a:round/>
+                      <a:headEnd type="none" w="med" len="med"/>
+                      <a:tailEnd type="none" w="med" len="med"/>
+                    </a:lnT>
+                    <a:lnB w="6350" cap="flat" cmpd="sng" algn="ctr">
+                      <a:solidFill>
+                        <a:srgbClr val="BFBFBF"/>
+                      </a:solidFill>
+                      <a:prstDash val="solid"/>
+                      <a:round/>
+                      <a:headEnd type="none" w="med" len="med"/>
+                      <a:tailEnd type="none" w="med" len="med"/>
+                    </a:lnB>
+                    <a:solidFill>
+                      <a:srgbClr val="FFFFFF"/>
+                    </a:solidFill>
+                  </a:tcPr>
+                </a:tc>
+                <a:tc>
+                  <a:txBody>
+                    <a:bodyPr/>
+                    <a:lstStyle/>
+                    <a:p>
+                      <a:pPr marL="0" indent="0" algn="l">
                         <a:buNone/>
                       </a:pPr>
                       <a:r>
                         <a:rPr lang="en-US" sz="1300" dirty="0">
-                          <a:solidFill>
-                            <a:srgbClr val="000000"/>
-                          </a:solidFill>
-                          <a:latin typeface="Calibri" pitchFamily="34" charset="0"/>
-                          <a:ea typeface="Calibri" pitchFamily="34" charset="-122"/>
-                          <a:cs typeface="Calibri" pitchFamily="34" charset="-120"/>
-                        </a:rPr>
-                        <a:t>Spatial rule-based simulation on LAMMPS</a:t>
-                      </a:r>
-                      <a:endParaRPr lang="en-US" sz="1300" dirty="0">
-                        <a:latin typeface="Calibri" charset="0"/>
-                        <a:ea typeface="Calibri" charset="0"/>
-                        <a:cs typeface="Calibri" charset="0"/>
-                      </a:endParaRPr>
-                    </a:p>
-                  </a:txBody>
-                  <a:tcPr marL="50800" marR="50800" marT="12700" marB="12700" anchor="ctr">
-                    <a:lnL w="6350" cap="flat" cmpd="sng" algn="ctr">
-                      <a:solidFill>
-                        <a:srgbClr val="BFBFBF"/>
-                      </a:solidFill>
-                      <a:prstDash val="solid"/>
-                      <a:round/>
-                      <a:headEnd type="none" w="med" len="med"/>
-                      <a:tailEnd type="none" w="med" len="med"/>
-                    </a:lnL>
-                    <a:lnR w="6350" cap="flat" cmpd="sng" algn="ctr">
-                      <a:solidFill>
-                        <a:srgbClr val="BFBFBF"/>
-                      </a:solidFill>
-                      <a:prstDash val="solid"/>
-                      <a:round/>
-                      <a:headEnd type="none" w="med" len="med"/>
-                      <a:tailEnd type="none" w="med" len="med"/>
-                    </a:lnR>
-                    <a:lnT w="6350" cap="flat" cmpd="sng" algn="ctr">
-                      <a:solidFill>
-                        <a:srgbClr val="BFBFBF"/>
-                      </a:solidFill>
-                      <a:prstDash val="solid"/>
-                      <a:round/>
-                      <a:headEnd type="none" w="med" len="med"/>
-                      <a:tailEnd type="none" w="med" len="med"/>
-                    </a:lnT>
-                    <a:lnB w="6350" cap="flat" cmpd="sng" algn="ctr">
-                      <a:solidFill>
-                        <a:srgbClr val="BFBFBF"/>
-                      </a:solidFill>
-                      <a:prstDash val="solid"/>
-                      <a:round/>
-                      <a:headEnd type="none" w="med" len="med"/>
-                      <a:tailEnd type="none" w="med" len="med"/>
-                    </a:lnB>
-                    <a:solidFill>
-                      <a:srgbClr val="FFFFFF"/>
-                    </a:solidFill>
-                  </a:tcPr>
-                </a:tc>
+                          <a:latin typeface="Calibri" charset="0"/>
+                          <a:ea typeface="Calibri" charset="0"/>
+                          <a:cs typeface="Calibri" charset="0"/>
+                        </a:rPr>
+                        <a:t>Visualization of </a:t>
+                      </a:r>
+                      <a:r>
+                        <a:rPr lang="en-US" sz="1300" dirty="0" err="1">
+                          <a:latin typeface="Calibri" charset="0"/>
+                          <a:ea typeface="Calibri" charset="0"/>
+                          <a:cs typeface="Calibri" charset="0"/>
+                        </a:rPr>
+                        <a:t>BioNetGen</a:t>
+                      </a:r>
+                      <a:r>
+                        <a:rPr lang="en-US" sz="1300" dirty="0">
+                          <a:latin typeface="Calibri" charset="0"/>
+                          <a:ea typeface="Calibri" charset="0"/>
+                          <a:cs typeface="Calibri" charset="0"/>
+                        </a:rPr>
+                        <a:t> rules</a:t>
+                      </a:r>
+                    </a:p>
+                  </a:txBody>
+                  <a:tcPr marL="50800" marR="50800" marT="12700" marB="12700" anchor="ctr">
+                    <a:lnL w="6350" cap="flat" cmpd="sng" algn="ctr">
+                      <a:solidFill>
+                        <a:srgbClr val="BFBFBF"/>
+                      </a:solidFill>
+                      <a:prstDash val="solid"/>
+                      <a:round/>
+                      <a:headEnd type="none" w="med" len="med"/>
+                      <a:tailEnd type="none" w="med" len="med"/>
+                    </a:lnL>
+                    <a:lnR w="6350" cap="flat" cmpd="sng" algn="ctr">
+                      <a:solidFill>
+                        <a:srgbClr val="BFBFBF"/>
+                      </a:solidFill>
+                      <a:prstDash val="solid"/>
+                      <a:round/>
+                      <a:headEnd type="none" w="med" len="med"/>
+                      <a:tailEnd type="none" w="med" len="med"/>
+                    </a:lnR>
+                    <a:lnT w="6350" cap="flat" cmpd="sng" algn="ctr">
+                      <a:solidFill>
+                        <a:srgbClr val="BFBFBF"/>
+                      </a:solidFill>
+                      <a:prstDash val="solid"/>
+                      <a:round/>
+                      <a:headEnd type="none" w="med" len="med"/>
+                      <a:tailEnd type="none" w="med" len="med"/>
+                    </a:lnT>
+                    <a:lnB w="6350" cap="flat" cmpd="sng" algn="ctr">
+                      <a:solidFill>
+                        <a:srgbClr val="BFBFBF"/>
+                      </a:solidFill>
+                      <a:prstDash val="solid"/>
+                      <a:round/>
+                      <a:headEnd type="none" w="med" len="med"/>
+                      <a:tailEnd type="none" w="med" len="med"/>
+                    </a:lnB>
+                    <a:solidFill>
+                      <a:srgbClr val="FFFFFF"/>
+                    </a:solidFill>
+                  </a:tcPr>
+                </a:tc>
+                <a:extLst>
+                  <a:ext uri="{0D108BD9-81ED-4DB2-BD59-A6C34878D82A}">
+                    <a16:rowId xmlns:a16="http://schemas.microsoft.com/office/drawing/2014/main" val="188505773"/>
+                  </a:ext>
+                </a:extLst>
               </a:tr>
               <a:tr h="457200">
                 <a:tc>
@@ -1988,205 +1798,191 @@
                     <a:bodyPr/>
                     <a:lstStyle/>
                     <a:p>
-                      <a:pPr algn="l" indent="0" marL="0">
-                        <a:buNone/>
-                      </a:pPr>
-                      <a:r>
-                        <a:rPr lang="en-US" sz="1300" b="1" dirty="0">
-                          <a:solidFill>
-                            <a:srgbClr val="000000"/>
-                          </a:solidFill>
-                          <a:latin typeface="Calibri" pitchFamily="34" charset="0"/>
-                          <a:ea typeface="Calibri" pitchFamily="34" charset="-122"/>
-                          <a:cs typeface="Calibri" pitchFamily="34" charset="-120"/>
-                        </a:rPr>
-                        <a:t>MCell-R / MCell4</a:t>
-                      </a:r>
-                      <a:endParaRPr lang="en-US" sz="1300" dirty="0">
-                        <a:latin typeface="Calibri" charset="0"/>
-                        <a:ea typeface="Calibri" charset="0"/>
-                        <a:cs typeface="Calibri" charset="0"/>
-                      </a:endParaRPr>
-                    </a:p>
-                  </a:txBody>
-                  <a:tcPr marL="50800" marR="50800" marT="12700" marB="12700" anchor="ctr">
-                    <a:lnL w="6350" cap="flat" cmpd="sng" algn="ctr">
-                      <a:solidFill>
-                        <a:srgbClr val="BFBFBF"/>
-                      </a:solidFill>
-                      <a:prstDash val="solid"/>
-                      <a:round/>
-                      <a:headEnd type="none" w="med" len="med"/>
-                      <a:tailEnd type="none" w="med" len="med"/>
-                    </a:lnL>
-                    <a:lnR w="6350" cap="flat" cmpd="sng" algn="ctr">
-                      <a:solidFill>
-                        <a:srgbClr val="BFBFBF"/>
-                      </a:solidFill>
-                      <a:prstDash val="solid"/>
-                      <a:round/>
-                      <a:headEnd type="none" w="med" len="med"/>
-                      <a:tailEnd type="none" w="med" len="med"/>
-                    </a:lnR>
-                    <a:lnT w="6350" cap="flat" cmpd="sng" algn="ctr">
-                      <a:solidFill>
-                        <a:srgbClr val="BFBFBF"/>
-                      </a:solidFill>
-                      <a:prstDash val="solid"/>
-                      <a:round/>
-                      <a:headEnd type="none" w="med" len="med"/>
-                      <a:tailEnd type="none" w="med" len="med"/>
-                    </a:lnT>
-                    <a:lnB w="6350" cap="flat" cmpd="sng" algn="ctr">
-                      <a:solidFill>
-                        <a:srgbClr val="BFBFBF"/>
-                      </a:solidFill>
-                      <a:prstDash val="solid"/>
-                      <a:round/>
-                      <a:headEnd type="none" w="med" len="med"/>
-                      <a:tailEnd type="none" w="med" len="med"/>
-                    </a:lnB>
-                    <a:solidFill>
-                      <a:srgbClr val="FFFFFF"/>
-                    </a:solidFill>
-                  </a:tcPr>
-                </a:tc>
-                <a:tc>
-                  <a:txBody>
-                    <a:bodyPr/>
-                    <a:lstStyle/>
-                    <a:p>
-                      <a:pPr algn="l" indent="0" marL="0">
+                      <a:pPr marL="0" indent="0" algn="l">
+                        <a:buNone/>
+                      </a:pPr>
+                      <a:r>
+                        <a:rPr lang="en-US" sz="1300" b="1" dirty="0" err="1">
+                          <a:latin typeface="Calibri" charset="0"/>
+                          <a:ea typeface="Calibri" charset="0"/>
+                          <a:cs typeface="Calibri" charset="0"/>
+                        </a:rPr>
+                        <a:t>RulesRailroad</a:t>
+                      </a:r>
+                      <a:endParaRPr lang="en-US" sz="1300" b="1" dirty="0">
+                        <a:latin typeface="Calibri" charset="0"/>
+                        <a:ea typeface="Calibri" charset="0"/>
+                        <a:cs typeface="Calibri" charset="0"/>
+                      </a:endParaRPr>
+                    </a:p>
+                  </a:txBody>
+                  <a:tcPr marL="50800" marR="50800" marT="12700" marB="12700" anchor="ctr">
+                    <a:lnL w="6350" cap="flat" cmpd="sng" algn="ctr">
+                      <a:solidFill>
+                        <a:srgbClr val="BFBFBF"/>
+                      </a:solidFill>
+                      <a:prstDash val="solid"/>
+                      <a:round/>
+                      <a:headEnd type="none" w="med" len="med"/>
+                      <a:tailEnd type="none" w="med" len="med"/>
+                    </a:lnL>
+                    <a:lnR w="6350" cap="flat" cmpd="sng" algn="ctr">
+                      <a:solidFill>
+                        <a:srgbClr val="BFBFBF"/>
+                      </a:solidFill>
+                      <a:prstDash val="solid"/>
+                      <a:round/>
+                      <a:headEnd type="none" w="med" len="med"/>
+                      <a:tailEnd type="none" w="med" len="med"/>
+                    </a:lnR>
+                    <a:lnT w="6350" cap="flat" cmpd="sng" algn="ctr">
+                      <a:solidFill>
+                        <a:srgbClr val="BFBFBF"/>
+                      </a:solidFill>
+                      <a:prstDash val="solid"/>
+                      <a:round/>
+                      <a:headEnd type="none" w="med" len="med"/>
+                      <a:tailEnd type="none" w="med" len="med"/>
+                    </a:lnT>
+                    <a:lnB w="6350" cap="flat" cmpd="sng" algn="ctr">
+                      <a:solidFill>
+                        <a:srgbClr val="BFBFBF"/>
+                      </a:solidFill>
+                      <a:prstDash val="solid"/>
+                      <a:round/>
+                      <a:headEnd type="none" w="med" len="med"/>
+                      <a:tailEnd type="none" w="med" len="med"/>
+                    </a:lnB>
+                    <a:solidFill>
+                      <a:srgbClr val="FFFFFF"/>
+                    </a:solidFill>
+                  </a:tcPr>
+                </a:tc>
+                <a:tc>
+                  <a:txBody>
+                    <a:bodyPr/>
+                    <a:lstStyle/>
+                    <a:p>
+                      <a:pPr marL="0" indent="0" algn="l">
                         <a:buNone/>
                       </a:pPr>
                       <a:r>
                         <a:rPr lang="en-US" sz="1300" dirty="0">
-                          <a:solidFill>
-                            <a:srgbClr val="000000"/>
-                          </a:solidFill>
-                          <a:latin typeface="Calibri" pitchFamily="34" charset="0"/>
-                          <a:ea typeface="Calibri" pitchFamily="34" charset="-122"/>
-                          <a:cs typeface="Calibri" pitchFamily="34" charset="-120"/>
+                          <a:latin typeface="Calibri" charset="0"/>
+                          <a:ea typeface="Calibri" charset="0"/>
+                          <a:cs typeface="Calibri" charset="0"/>
                         </a:rPr>
                         <a:t>BNGL</a:t>
                       </a:r>
-                      <a:endParaRPr lang="en-US" sz="1300" dirty="0">
-                        <a:latin typeface="Calibri" charset="0"/>
-                        <a:ea typeface="Calibri" charset="0"/>
-                        <a:cs typeface="Calibri" charset="0"/>
-                      </a:endParaRPr>
-                    </a:p>
-                  </a:txBody>
-                  <a:tcPr marL="50800" marR="50800" marT="12700" marB="12700" anchor="ctr">
-                    <a:lnL w="6350" cap="flat" cmpd="sng" algn="ctr">
-                      <a:solidFill>
-                        <a:srgbClr val="BFBFBF"/>
-                      </a:solidFill>
-                      <a:prstDash val="solid"/>
-                      <a:round/>
-                      <a:headEnd type="none" w="med" len="med"/>
-                      <a:tailEnd type="none" w="med" len="med"/>
-                    </a:lnL>
-                    <a:lnR w="6350" cap="flat" cmpd="sng" algn="ctr">
-                      <a:solidFill>
-                        <a:srgbClr val="BFBFBF"/>
-                      </a:solidFill>
-                      <a:prstDash val="solid"/>
-                      <a:round/>
-                      <a:headEnd type="none" w="med" len="med"/>
-                      <a:tailEnd type="none" w="med" len="med"/>
-                    </a:lnR>
-                    <a:lnT w="6350" cap="flat" cmpd="sng" algn="ctr">
-                      <a:solidFill>
-                        <a:srgbClr val="BFBFBF"/>
-                      </a:solidFill>
-                      <a:prstDash val="solid"/>
-                      <a:round/>
-                      <a:headEnd type="none" w="med" len="med"/>
-                      <a:tailEnd type="none" w="med" len="med"/>
-                    </a:lnT>
-                    <a:lnB w="6350" cap="flat" cmpd="sng" algn="ctr">
-                      <a:solidFill>
-                        <a:srgbClr val="BFBFBF"/>
-                      </a:solidFill>
-                      <a:prstDash val="solid"/>
-                      <a:round/>
-                      <a:headEnd type="none" w="med" len="med"/>
-                      <a:tailEnd type="none" w="med" len="med"/>
-                    </a:lnB>
-                    <a:solidFill>
-                      <a:srgbClr val="FFFFFF"/>
-                    </a:solidFill>
-                  </a:tcPr>
-                </a:tc>
-                <a:tc>
-                  <a:txBody>
-                    <a:bodyPr/>
-                    <a:lstStyle/>
-                    <a:p>
-                      <a:pPr algn="l" indent="0" marL="0">
+                    </a:p>
+                  </a:txBody>
+                  <a:tcPr marL="50800" marR="50800" marT="12700" marB="12700" anchor="ctr">
+                    <a:lnL w="6350" cap="flat" cmpd="sng" algn="ctr">
+                      <a:solidFill>
+                        <a:srgbClr val="BFBFBF"/>
+                      </a:solidFill>
+                      <a:prstDash val="solid"/>
+                      <a:round/>
+                      <a:headEnd type="none" w="med" len="med"/>
+                      <a:tailEnd type="none" w="med" len="med"/>
+                    </a:lnL>
+                    <a:lnR w="6350" cap="flat" cmpd="sng" algn="ctr">
+                      <a:solidFill>
+                        <a:srgbClr val="BFBFBF"/>
+                      </a:solidFill>
+                      <a:prstDash val="solid"/>
+                      <a:round/>
+                      <a:headEnd type="none" w="med" len="med"/>
+                      <a:tailEnd type="none" w="med" len="med"/>
+                    </a:lnR>
+                    <a:lnT w="6350" cap="flat" cmpd="sng" algn="ctr">
+                      <a:solidFill>
+                        <a:srgbClr val="BFBFBF"/>
+                      </a:solidFill>
+                      <a:prstDash val="solid"/>
+                      <a:round/>
+                      <a:headEnd type="none" w="med" len="med"/>
+                      <a:tailEnd type="none" w="med" len="med"/>
+                    </a:lnT>
+                    <a:lnB w="6350" cap="flat" cmpd="sng" algn="ctr">
+                      <a:solidFill>
+                        <a:srgbClr val="BFBFBF"/>
+                      </a:solidFill>
+                      <a:prstDash val="solid"/>
+                      <a:round/>
+                      <a:headEnd type="none" w="med" len="med"/>
+                      <a:tailEnd type="none" w="med" len="med"/>
+                    </a:lnB>
+                    <a:solidFill>
+                      <a:srgbClr val="FFFFFF"/>
+                    </a:solidFill>
+                  </a:tcPr>
+                </a:tc>
+                <a:tc>
+                  <a:txBody>
+                    <a:bodyPr/>
+                    <a:lstStyle/>
+                    <a:p>
+                      <a:pPr marL="0" indent="0" algn="l">
                         <a:buNone/>
                       </a:pPr>
                       <a:r>
                         <a:rPr lang="en-US" sz="1300" dirty="0">
-                          <a:solidFill>
-                            <a:srgbClr val="000000"/>
-                          </a:solidFill>
-                          <a:latin typeface="Calibri" pitchFamily="34" charset="0"/>
-                          <a:ea typeface="Calibri" pitchFamily="34" charset="-122"/>
-                          <a:cs typeface="Calibri" pitchFamily="34" charset="-120"/>
-                        </a:rPr>
-                        <a:t>Particle-resolution spatial network-free simulator</a:t>
-                      </a:r>
-                      <a:endParaRPr lang="en-US" sz="1300" dirty="0">
-                        <a:latin typeface="Calibri" charset="0"/>
-                        <a:ea typeface="Calibri" charset="0"/>
-                        <a:cs typeface="Calibri" charset="0"/>
-                      </a:endParaRPr>
-                    </a:p>
-                  </a:txBody>
-                  <a:tcPr marL="50800" marR="50800" marT="12700" marB="12700" anchor="ctr">
-                    <a:lnL w="6350" cap="flat" cmpd="sng" algn="ctr">
-                      <a:solidFill>
-                        <a:srgbClr val="BFBFBF"/>
-                      </a:solidFill>
-                      <a:prstDash val="solid"/>
-                      <a:round/>
-                      <a:headEnd type="none" w="med" len="med"/>
-                      <a:tailEnd type="none" w="med" len="med"/>
-                    </a:lnL>
-                    <a:lnR w="6350" cap="flat" cmpd="sng" algn="ctr">
-                      <a:solidFill>
-                        <a:srgbClr val="BFBFBF"/>
-                      </a:solidFill>
-                      <a:prstDash val="solid"/>
-                      <a:round/>
-                      <a:headEnd type="none" w="med" len="med"/>
-                      <a:tailEnd type="none" w="med" len="med"/>
-                    </a:lnR>
-                    <a:lnT w="6350" cap="flat" cmpd="sng" algn="ctr">
-                      <a:solidFill>
-                        <a:srgbClr val="BFBFBF"/>
-                      </a:solidFill>
-                      <a:prstDash val="solid"/>
-                      <a:round/>
-                      <a:headEnd type="none" w="med" len="med"/>
-                      <a:tailEnd type="none" w="med" len="med"/>
-                    </a:lnT>
-                    <a:lnB w="6350" cap="flat" cmpd="sng" algn="ctr">
-                      <a:solidFill>
-                        <a:srgbClr val="BFBFBF"/>
-                      </a:solidFill>
-                      <a:prstDash val="solid"/>
-                      <a:round/>
-                      <a:headEnd type="none" w="med" len="med"/>
-                      <a:tailEnd type="none" w="med" len="med"/>
-                    </a:lnB>
-                    <a:solidFill>
-                      <a:srgbClr val="FFFFFF"/>
-                    </a:solidFill>
-                  </a:tcPr>
-                </a:tc>
+                          <a:latin typeface="Calibri" charset="0"/>
+                          <a:ea typeface="Calibri" charset="0"/>
+                          <a:cs typeface="Calibri" charset="0"/>
+                        </a:rPr>
+                        <a:t>Diagrams for visualizing rule-based model specifications</a:t>
+                      </a:r>
+                    </a:p>
+                  </a:txBody>
+                  <a:tcPr marL="50800" marR="50800" marT="12700" marB="12700" anchor="ctr">
+                    <a:lnL w="6350" cap="flat" cmpd="sng" algn="ctr">
+                      <a:solidFill>
+                        <a:srgbClr val="BFBFBF"/>
+                      </a:solidFill>
+                      <a:prstDash val="solid"/>
+                      <a:round/>
+                      <a:headEnd type="none" w="med" len="med"/>
+                      <a:tailEnd type="none" w="med" len="med"/>
+                    </a:lnL>
+                    <a:lnR w="6350" cap="flat" cmpd="sng" algn="ctr">
+                      <a:solidFill>
+                        <a:srgbClr val="BFBFBF"/>
+                      </a:solidFill>
+                      <a:prstDash val="solid"/>
+                      <a:round/>
+                      <a:headEnd type="none" w="med" len="med"/>
+                      <a:tailEnd type="none" w="med" len="med"/>
+                    </a:lnR>
+                    <a:lnT w="6350" cap="flat" cmpd="sng" algn="ctr">
+                      <a:solidFill>
+                        <a:srgbClr val="BFBFBF"/>
+                      </a:solidFill>
+                      <a:prstDash val="solid"/>
+                      <a:round/>
+                      <a:headEnd type="none" w="med" len="med"/>
+                      <a:tailEnd type="none" w="med" len="med"/>
+                    </a:lnT>
+                    <a:lnB w="6350" cap="flat" cmpd="sng" algn="ctr">
+                      <a:solidFill>
+                        <a:srgbClr val="BFBFBF"/>
+                      </a:solidFill>
+                      <a:prstDash val="solid"/>
+                      <a:round/>
+                      <a:headEnd type="none" w="med" len="med"/>
+                      <a:tailEnd type="none" w="med" len="med"/>
+                    </a:lnB>
+                    <a:solidFill>
+                      <a:srgbClr val="FFFFFF"/>
+                    </a:solidFill>
+                  </a:tcPr>
+                </a:tc>
+                <a:extLst>
+                  <a:ext uri="{0D108BD9-81ED-4DB2-BD59-A6C34878D82A}">
+                    <a16:rowId xmlns:a16="http://schemas.microsoft.com/office/drawing/2014/main" val="1710378163"/>
+                  </a:ext>
+                </a:extLst>
               </a:tr>
               <a:tr h="457200">
                 <a:tc>
@@ -2194,7 +1990,7 @@
                     <a:bodyPr/>
                     <a:lstStyle/>
                     <a:p>
-                      <a:pPr algn="l" indent="0" marL="0">
+                      <a:pPr marL="0" indent="0" algn="l">
                         <a:buNone/>
                       </a:pPr>
                       <a:r>
@@ -2206,7 +2002,7 @@
                           <a:ea typeface="Calibri" pitchFamily="34" charset="-122"/>
                           <a:cs typeface="Calibri" pitchFamily="34" charset="-120"/>
                         </a:rPr>
-                        <a:t>NERDSS</a:t>
+                        <a:t>Smoldyn</a:t>
                       </a:r>
                       <a:endParaRPr lang="en-US" sz="1300" dirty="0">
                         <a:latin typeface="Calibri" charset="0"/>
@@ -2262,7 +2058,7 @@
                     <a:bodyPr/>
                     <a:lstStyle/>
                     <a:p>
-                      <a:pPr algn="l" indent="0" marL="0">
+                      <a:pPr marL="0" indent="0" algn="l">
                         <a:buNone/>
                       </a:pPr>
                       <a:r>
@@ -2274,7 +2070,7 @@
                           <a:ea typeface="Calibri" pitchFamily="34" charset="-122"/>
                           <a:cs typeface="Calibri" pitchFamily="34" charset="-120"/>
                         </a:rPr>
-                        <a:t>BNGL-style</a:t>
+                        <a:t>BNGL-style, BNGL</a:t>
                       </a:r>
                       <a:endParaRPr lang="en-US" sz="1300" dirty="0">
                         <a:latin typeface="Calibri" charset="0"/>
@@ -2330,7 +2126,7 @@
                     <a:bodyPr/>
                     <a:lstStyle/>
                     <a:p>
-                      <a:pPr algn="l" indent="0" marL="0">
+                      <a:pPr marL="0" indent="0" algn="l">
                         <a:buNone/>
                       </a:pPr>
                       <a:r>
@@ -2342,7 +2138,7 @@
                           <a:ea typeface="Calibri" pitchFamily="34" charset="-122"/>
                           <a:cs typeface="Calibri" pitchFamily="34" charset="-120"/>
                         </a:rPr>
-                        <a:t>Structure-resolved stochastic reaction-diffusion for self-assembly</a:t>
+                        <a:t>Spatial particle simulator that reads BNGL</a:t>
                       </a:r>
                       <a:endParaRPr lang="en-US" sz="1300" dirty="0">
                         <a:latin typeface="Calibri" charset="0"/>
@@ -2393,6 +2189,11 @@
                     </a:solidFill>
                   </a:tcPr>
                 </a:tc>
+                <a:extLst>
+                  <a:ext uri="{0D108BD9-81ED-4DB2-BD59-A6C34878D82A}">
+                    <a16:rowId xmlns:a16="http://schemas.microsoft.com/office/drawing/2014/main" val="10002"/>
+                  </a:ext>
+                </a:extLst>
               </a:tr>
               <a:tr h="457200">
                 <a:tc>
@@ -2400,7 +2201,7 @@
                     <a:bodyPr/>
                     <a:lstStyle/>
                     <a:p>
-                      <a:pPr algn="l" indent="0" marL="0">
+                      <a:pPr marL="0" indent="0" algn="l">
                         <a:buNone/>
                       </a:pPr>
                       <a:r>
@@ -2412,7 +2213,7 @@
                           <a:ea typeface="Calibri" pitchFamily="34" charset="-122"/>
                           <a:cs typeface="Calibri" pitchFamily="34" charset="-120"/>
                         </a:rPr>
-                        <a:t>pySB</a:t>
+                        <a:t>SRSim</a:t>
                       </a:r>
                       <a:endParaRPr lang="en-US" sz="1300" dirty="0">
                         <a:latin typeface="Calibri" charset="0"/>
@@ -2468,7 +2269,7 @@
                     <a:bodyPr/>
                     <a:lstStyle/>
                     <a:p>
-                      <a:pPr algn="l" indent="0" marL="0">
+                      <a:pPr marL="0" indent="0" algn="l">
                         <a:buNone/>
                       </a:pPr>
                       <a:r>
@@ -2480,7 +2281,7 @@
                           <a:ea typeface="Calibri" pitchFamily="34" charset="-122"/>
                           <a:cs typeface="Calibri" pitchFamily="34" charset="-120"/>
                         </a:rPr>
-                        <a:t>BNGL / Kappa</a:t>
+                        <a:t>BNGL</a:t>
                       </a:r>
                       <a:endParaRPr lang="en-US" sz="1300" dirty="0">
                         <a:latin typeface="Calibri" charset="0"/>
@@ -2536,7 +2337,7 @@
                     <a:bodyPr/>
                     <a:lstStyle/>
                     <a:p>
-                      <a:pPr algn="l" indent="0" marL="0">
+                      <a:pPr marL="0" indent="0" algn="l">
                         <a:buNone/>
                       </a:pPr>
                       <a:r>
@@ -2548,7 +2349,7 @@
                           <a:ea typeface="Calibri" pitchFamily="34" charset="-122"/>
                           <a:cs typeface="Calibri" pitchFamily="34" charset="-120"/>
                         </a:rPr>
-                        <a:t>Python framework, compiles to BNGL with a BNG or NFsim backend</a:t>
+                        <a:t>Spatial rule-based simulation on LAMMPS</a:t>
                       </a:r>
                       <a:endParaRPr lang="en-US" sz="1300" dirty="0">
                         <a:latin typeface="Calibri" charset="0"/>
@@ -2599,6 +2400,11 @@
                     </a:solidFill>
                   </a:tcPr>
                 </a:tc>
+                <a:extLst>
+                  <a:ext uri="{0D108BD9-81ED-4DB2-BD59-A6C34878D82A}">
+                    <a16:rowId xmlns:a16="http://schemas.microsoft.com/office/drawing/2014/main" val="10003"/>
+                  </a:ext>
+                </a:extLst>
               </a:tr>
               <a:tr h="457200">
                 <a:tc>
@@ -2606,7 +2412,7 @@
                     <a:bodyPr/>
                     <a:lstStyle/>
                     <a:p>
-                      <a:pPr algn="l" indent="0" marL="0">
+                      <a:pPr marL="0" indent="0" algn="l">
                         <a:buNone/>
                       </a:pPr>
                       <a:r>
@@ -2618,7 +2424,7 @@
                           <a:ea typeface="Calibri" pitchFamily="34" charset="-122"/>
                           <a:cs typeface="Calibri" pitchFamily="34" charset="-120"/>
                         </a:rPr>
-                        <a:t>Parts&amp;Pools</a:t>
+                        <a:t>MCell-R / MCell4</a:t>
                       </a:r>
                       <a:endParaRPr lang="en-US" sz="1300" dirty="0">
                         <a:latin typeface="Calibri" charset="0"/>
@@ -2674,7 +2480,7 @@
                     <a:bodyPr/>
                     <a:lstStyle/>
                     <a:p>
-                      <a:pPr algn="l" indent="0" marL="0">
+                      <a:pPr marL="0" indent="0" algn="l">
                         <a:buNone/>
                       </a:pPr>
                       <a:r>
@@ -2742,7 +2548,7 @@
                     <a:bodyPr/>
                     <a:lstStyle/>
                     <a:p>
-                      <a:pPr algn="l" indent="0" marL="0">
+                      <a:pPr marL="0" indent="0" algn="l">
                         <a:buNone/>
                       </a:pPr>
                       <a:r>
@@ -2754,7 +2560,7 @@
                           <a:ea typeface="Calibri" pitchFamily="34" charset="-122"/>
                           <a:cs typeface="Calibri" pitchFamily="34" charset="-120"/>
                         </a:rPr>
-                        <a:t>Modular synthetic gene circuit design via BioNetGen</a:t>
+                        <a:t>Particle-resolution spatial network-free simulator</a:t>
                       </a:r>
                       <a:endParaRPr lang="en-US" sz="1300" dirty="0">
                         <a:latin typeface="Calibri" charset="0"/>
@@ -2805,6 +2611,11 @@
                     </a:solidFill>
                   </a:tcPr>
                 </a:tc>
+                <a:extLst>
+                  <a:ext uri="{0D108BD9-81ED-4DB2-BD59-A6C34878D82A}">
+                    <a16:rowId xmlns:a16="http://schemas.microsoft.com/office/drawing/2014/main" val="10004"/>
+                  </a:ext>
+                </a:extLst>
               </a:tr>
               <a:tr h="457200">
                 <a:tc>
@@ -2812,7 +2623,7 @@
                     <a:bodyPr/>
                     <a:lstStyle/>
                     <a:p>
-                      <a:pPr algn="l" indent="0" marL="0">
+                      <a:pPr marL="0" indent="0" algn="l">
                         <a:buNone/>
                       </a:pPr>
                       <a:r>
@@ -2824,7 +2635,7 @@
                           <a:ea typeface="Calibri" pitchFamily="34" charset="-122"/>
                           <a:cs typeface="Calibri" pitchFamily="34" charset="-120"/>
                         </a:rPr>
-                        <a:t>MolClustPy</a:t>
+                        <a:t>NERDSS</a:t>
                       </a:r>
                       <a:endParaRPr lang="en-US" sz="1300" dirty="0">
                         <a:latin typeface="Calibri" charset="0"/>
@@ -2880,7 +2691,7 @@
                     <a:bodyPr/>
                     <a:lstStyle/>
                     <a:p>
-                      <a:pPr algn="l" indent="0" marL="0">
+                      <a:pPr marL="0" indent="0" algn="l">
                         <a:buNone/>
                       </a:pPr>
                       <a:r>
@@ -2892,7 +2703,7 @@
                           <a:ea typeface="Calibri" pitchFamily="34" charset="-122"/>
                           <a:cs typeface="Calibri" pitchFamily="34" charset="-120"/>
                         </a:rPr>
-                        <a:t>NFsim</a:t>
+                        <a:t>BNGL-style</a:t>
                       </a:r>
                       <a:endParaRPr lang="en-US" sz="1300" dirty="0">
                         <a:latin typeface="Calibri" charset="0"/>
@@ -2948,7 +2759,7 @@
                     <a:bodyPr/>
                     <a:lstStyle/>
                     <a:p>
-                      <a:pPr algn="l" indent="0" marL="0">
+                      <a:pPr marL="0" indent="0" algn="l">
                         <a:buNone/>
                       </a:pPr>
                       <a:r>
@@ -2960,7 +2771,7 @@
                           <a:ea typeface="Calibri" pitchFamily="34" charset="-122"/>
                           <a:cs typeface="Calibri" pitchFamily="34" charset="-120"/>
                         </a:rPr>
-                        <a:t>Molecular cluster analysis over NFsim runs</a:t>
+                        <a:t>Structure-resolved stochastic reaction-diffusion for self-assembly</a:t>
                       </a:r>
                       <a:endParaRPr lang="en-US" sz="1300" dirty="0">
                         <a:latin typeface="Calibri" charset="0"/>
@@ -3011,6 +2822,433 @@
                     </a:solidFill>
                   </a:tcPr>
                 </a:tc>
+                <a:extLst>
+                  <a:ext uri="{0D108BD9-81ED-4DB2-BD59-A6C34878D82A}">
+                    <a16:rowId xmlns:a16="http://schemas.microsoft.com/office/drawing/2014/main" val="10005"/>
+                  </a:ext>
+                </a:extLst>
+              </a:tr>
+              <a:tr h="457200">
+                <a:tc>
+                  <a:txBody>
+                    <a:bodyPr/>
+                    <a:lstStyle/>
+                    <a:p>
+                      <a:pPr marL="0" indent="0" algn="l">
+                        <a:buNone/>
+                      </a:pPr>
+                      <a:r>
+                        <a:rPr lang="en-US" sz="1300" b="1" dirty="0">
+                          <a:solidFill>
+                            <a:srgbClr val="000000"/>
+                          </a:solidFill>
+                          <a:latin typeface="Calibri" pitchFamily="34" charset="0"/>
+                          <a:ea typeface="Calibri" pitchFamily="34" charset="-122"/>
+                          <a:cs typeface="Calibri" pitchFamily="34" charset="-120"/>
+                        </a:rPr>
+                        <a:t>pySB</a:t>
+                      </a:r>
+                      <a:endParaRPr lang="en-US" sz="1300" dirty="0">
+                        <a:latin typeface="Calibri" charset="0"/>
+                        <a:ea typeface="Calibri" charset="0"/>
+                        <a:cs typeface="Calibri" charset="0"/>
+                      </a:endParaRPr>
+                    </a:p>
+                  </a:txBody>
+                  <a:tcPr marL="50800" marR="50800" marT="12700" marB="12700" anchor="ctr">
+                    <a:lnL w="6350" cap="flat" cmpd="sng" algn="ctr">
+                      <a:solidFill>
+                        <a:srgbClr val="BFBFBF"/>
+                      </a:solidFill>
+                      <a:prstDash val="solid"/>
+                      <a:round/>
+                      <a:headEnd type="none" w="med" len="med"/>
+                      <a:tailEnd type="none" w="med" len="med"/>
+                    </a:lnL>
+                    <a:lnR w="6350" cap="flat" cmpd="sng" algn="ctr">
+                      <a:solidFill>
+                        <a:srgbClr val="BFBFBF"/>
+                      </a:solidFill>
+                      <a:prstDash val="solid"/>
+                      <a:round/>
+                      <a:headEnd type="none" w="med" len="med"/>
+                      <a:tailEnd type="none" w="med" len="med"/>
+                    </a:lnR>
+                    <a:lnT w="6350" cap="flat" cmpd="sng" algn="ctr">
+                      <a:solidFill>
+                        <a:srgbClr val="BFBFBF"/>
+                      </a:solidFill>
+                      <a:prstDash val="solid"/>
+                      <a:round/>
+                      <a:headEnd type="none" w="med" len="med"/>
+                      <a:tailEnd type="none" w="med" len="med"/>
+                    </a:lnT>
+                    <a:lnB w="6350" cap="flat" cmpd="sng" algn="ctr">
+                      <a:solidFill>
+                        <a:srgbClr val="BFBFBF"/>
+                      </a:solidFill>
+                      <a:prstDash val="solid"/>
+                      <a:round/>
+                      <a:headEnd type="none" w="med" len="med"/>
+                      <a:tailEnd type="none" w="med" len="med"/>
+                    </a:lnB>
+                    <a:solidFill>
+                      <a:srgbClr val="FFFFFF"/>
+                    </a:solidFill>
+                  </a:tcPr>
+                </a:tc>
+                <a:tc>
+                  <a:txBody>
+                    <a:bodyPr/>
+                    <a:lstStyle/>
+                    <a:p>
+                      <a:pPr marL="0" indent="0" algn="l">
+                        <a:buNone/>
+                      </a:pPr>
+                      <a:r>
+                        <a:rPr lang="en-US" sz="1300" dirty="0">
+                          <a:solidFill>
+                            <a:srgbClr val="000000"/>
+                          </a:solidFill>
+                          <a:latin typeface="Calibri" pitchFamily="34" charset="0"/>
+                          <a:ea typeface="Calibri" pitchFamily="34" charset="-122"/>
+                          <a:cs typeface="Calibri" pitchFamily="34" charset="-120"/>
+                        </a:rPr>
+                        <a:t>BNGL / Kappa</a:t>
+                      </a:r>
+                      <a:endParaRPr lang="en-US" sz="1300" dirty="0">
+                        <a:latin typeface="Calibri" charset="0"/>
+                        <a:ea typeface="Calibri" charset="0"/>
+                        <a:cs typeface="Calibri" charset="0"/>
+                      </a:endParaRPr>
+                    </a:p>
+                  </a:txBody>
+                  <a:tcPr marL="50800" marR="50800" marT="12700" marB="12700" anchor="ctr">
+                    <a:lnL w="6350" cap="flat" cmpd="sng" algn="ctr">
+                      <a:solidFill>
+                        <a:srgbClr val="BFBFBF"/>
+                      </a:solidFill>
+                      <a:prstDash val="solid"/>
+                      <a:round/>
+                      <a:headEnd type="none" w="med" len="med"/>
+                      <a:tailEnd type="none" w="med" len="med"/>
+                    </a:lnL>
+                    <a:lnR w="6350" cap="flat" cmpd="sng" algn="ctr">
+                      <a:solidFill>
+                        <a:srgbClr val="BFBFBF"/>
+                      </a:solidFill>
+                      <a:prstDash val="solid"/>
+                      <a:round/>
+                      <a:headEnd type="none" w="med" len="med"/>
+                      <a:tailEnd type="none" w="med" len="med"/>
+                    </a:lnR>
+                    <a:lnT w="6350" cap="flat" cmpd="sng" algn="ctr">
+                      <a:solidFill>
+                        <a:srgbClr val="BFBFBF"/>
+                      </a:solidFill>
+                      <a:prstDash val="solid"/>
+                      <a:round/>
+                      <a:headEnd type="none" w="med" len="med"/>
+                      <a:tailEnd type="none" w="med" len="med"/>
+                    </a:lnT>
+                    <a:lnB w="6350" cap="flat" cmpd="sng" algn="ctr">
+                      <a:solidFill>
+                        <a:srgbClr val="BFBFBF"/>
+                      </a:solidFill>
+                      <a:prstDash val="solid"/>
+                      <a:round/>
+                      <a:headEnd type="none" w="med" len="med"/>
+                      <a:tailEnd type="none" w="med" len="med"/>
+                    </a:lnB>
+                    <a:solidFill>
+                      <a:srgbClr val="FFFFFF"/>
+                    </a:solidFill>
+                  </a:tcPr>
+                </a:tc>
+                <a:tc>
+                  <a:txBody>
+                    <a:bodyPr/>
+                    <a:lstStyle/>
+                    <a:p>
+                      <a:pPr marL="0" indent="0" algn="l">
+                        <a:buNone/>
+                      </a:pPr>
+                      <a:r>
+                        <a:rPr lang="en-US" sz="1300" dirty="0">
+                          <a:solidFill>
+                            <a:srgbClr val="000000"/>
+                          </a:solidFill>
+                          <a:latin typeface="Calibri" pitchFamily="34" charset="0"/>
+                          <a:ea typeface="Calibri" pitchFamily="34" charset="-122"/>
+                          <a:cs typeface="Calibri" pitchFamily="34" charset="-120"/>
+                        </a:rPr>
+                        <a:t>Python framework, compiles to BNGL with a BNG or NFsim backend</a:t>
+                      </a:r>
+                      <a:endParaRPr lang="en-US" sz="1300" dirty="0">
+                        <a:latin typeface="Calibri" charset="0"/>
+                        <a:ea typeface="Calibri" charset="0"/>
+                        <a:cs typeface="Calibri" charset="0"/>
+                      </a:endParaRPr>
+                    </a:p>
+                  </a:txBody>
+                  <a:tcPr marL="50800" marR="50800" marT="12700" marB="12700" anchor="ctr">
+                    <a:lnL w="6350" cap="flat" cmpd="sng" algn="ctr">
+                      <a:solidFill>
+                        <a:srgbClr val="BFBFBF"/>
+                      </a:solidFill>
+                      <a:prstDash val="solid"/>
+                      <a:round/>
+                      <a:headEnd type="none" w="med" len="med"/>
+                      <a:tailEnd type="none" w="med" len="med"/>
+                    </a:lnL>
+                    <a:lnR w="6350" cap="flat" cmpd="sng" algn="ctr">
+                      <a:solidFill>
+                        <a:srgbClr val="BFBFBF"/>
+                      </a:solidFill>
+                      <a:prstDash val="solid"/>
+                      <a:round/>
+                      <a:headEnd type="none" w="med" len="med"/>
+                      <a:tailEnd type="none" w="med" len="med"/>
+                    </a:lnR>
+                    <a:lnT w="6350" cap="flat" cmpd="sng" algn="ctr">
+                      <a:solidFill>
+                        <a:srgbClr val="BFBFBF"/>
+                      </a:solidFill>
+                      <a:prstDash val="solid"/>
+                      <a:round/>
+                      <a:headEnd type="none" w="med" len="med"/>
+                      <a:tailEnd type="none" w="med" len="med"/>
+                    </a:lnT>
+                    <a:lnB w="6350" cap="flat" cmpd="sng" algn="ctr">
+                      <a:solidFill>
+                        <a:srgbClr val="BFBFBF"/>
+                      </a:solidFill>
+                      <a:prstDash val="solid"/>
+                      <a:round/>
+                      <a:headEnd type="none" w="med" len="med"/>
+                      <a:tailEnd type="none" w="med" len="med"/>
+                    </a:lnB>
+                    <a:solidFill>
+                      <a:srgbClr val="FFFFFF"/>
+                    </a:solidFill>
+                  </a:tcPr>
+                </a:tc>
+                <a:extLst>
+                  <a:ext uri="{0D108BD9-81ED-4DB2-BD59-A6C34878D82A}">
+                    <a16:rowId xmlns:a16="http://schemas.microsoft.com/office/drawing/2014/main" val="10006"/>
+                  </a:ext>
+                </a:extLst>
+              </a:tr>
+              <a:tr h="457200">
+                <a:tc>
+                  <a:txBody>
+                    <a:bodyPr/>
+                    <a:lstStyle/>
+                    <a:p>
+                      <a:pPr marL="0" indent="0" algn="l">
+                        <a:buNone/>
+                      </a:pPr>
+                      <a:r>
+                        <a:rPr lang="en-US" sz="1300" b="1" dirty="0">
+                          <a:solidFill>
+                            <a:srgbClr val="000000"/>
+                          </a:solidFill>
+                          <a:latin typeface="Calibri" pitchFamily="34" charset="0"/>
+                          <a:ea typeface="Calibri" pitchFamily="34" charset="-122"/>
+                          <a:cs typeface="Calibri" pitchFamily="34" charset="-120"/>
+                        </a:rPr>
+                        <a:t>Parts&amp;Pools</a:t>
+                      </a:r>
+                      <a:endParaRPr lang="en-US" sz="1300" dirty="0">
+                        <a:latin typeface="Calibri" charset="0"/>
+                        <a:ea typeface="Calibri" charset="0"/>
+                        <a:cs typeface="Calibri" charset="0"/>
+                      </a:endParaRPr>
+                    </a:p>
+                  </a:txBody>
+                  <a:tcPr marL="50800" marR="50800" marT="12700" marB="12700" anchor="ctr">
+                    <a:lnL w="6350" cap="flat" cmpd="sng" algn="ctr">
+                      <a:solidFill>
+                        <a:srgbClr val="BFBFBF"/>
+                      </a:solidFill>
+                      <a:prstDash val="solid"/>
+                      <a:round/>
+                      <a:headEnd type="none" w="med" len="med"/>
+                      <a:tailEnd type="none" w="med" len="med"/>
+                    </a:lnL>
+                    <a:lnR w="6350" cap="flat" cmpd="sng" algn="ctr">
+                      <a:solidFill>
+                        <a:srgbClr val="BFBFBF"/>
+                      </a:solidFill>
+                      <a:prstDash val="solid"/>
+                      <a:round/>
+                      <a:headEnd type="none" w="med" len="med"/>
+                      <a:tailEnd type="none" w="med" len="med"/>
+                    </a:lnR>
+                    <a:lnT w="6350" cap="flat" cmpd="sng" algn="ctr">
+                      <a:solidFill>
+                        <a:srgbClr val="BFBFBF"/>
+                      </a:solidFill>
+                      <a:prstDash val="solid"/>
+                      <a:round/>
+                      <a:headEnd type="none" w="med" len="med"/>
+                      <a:tailEnd type="none" w="med" len="med"/>
+                    </a:lnT>
+                    <a:lnB w="6350" cap="flat" cmpd="sng" algn="ctr">
+                      <a:solidFill>
+                        <a:srgbClr val="BFBFBF"/>
+                      </a:solidFill>
+                      <a:prstDash val="solid"/>
+                      <a:round/>
+                      <a:headEnd type="none" w="med" len="med"/>
+                      <a:tailEnd type="none" w="med" len="med"/>
+                    </a:lnB>
+                    <a:solidFill>
+                      <a:srgbClr val="FFFFFF"/>
+                    </a:solidFill>
+                  </a:tcPr>
+                </a:tc>
+                <a:tc>
+                  <a:txBody>
+                    <a:bodyPr/>
+                    <a:lstStyle/>
+                    <a:p>
+                      <a:pPr marL="0" indent="0" algn="l">
+                        <a:buNone/>
+                      </a:pPr>
+                      <a:r>
+                        <a:rPr lang="en-US" sz="1300" dirty="0">
+                          <a:solidFill>
+                            <a:srgbClr val="000000"/>
+                          </a:solidFill>
+                          <a:latin typeface="Calibri" pitchFamily="34" charset="0"/>
+                          <a:ea typeface="Calibri" pitchFamily="34" charset="-122"/>
+                          <a:cs typeface="Calibri" pitchFamily="34" charset="-120"/>
+                        </a:rPr>
+                        <a:t>BNGL</a:t>
+                      </a:r>
+                      <a:endParaRPr lang="en-US" sz="1300" dirty="0">
+                        <a:latin typeface="Calibri" charset="0"/>
+                        <a:ea typeface="Calibri" charset="0"/>
+                        <a:cs typeface="Calibri" charset="0"/>
+                      </a:endParaRPr>
+                    </a:p>
+                  </a:txBody>
+                  <a:tcPr marL="50800" marR="50800" marT="12700" marB="12700" anchor="ctr">
+                    <a:lnL w="6350" cap="flat" cmpd="sng" algn="ctr">
+                      <a:solidFill>
+                        <a:srgbClr val="BFBFBF"/>
+                      </a:solidFill>
+                      <a:prstDash val="solid"/>
+                      <a:round/>
+                      <a:headEnd type="none" w="med" len="med"/>
+                      <a:tailEnd type="none" w="med" len="med"/>
+                    </a:lnL>
+                    <a:lnR w="6350" cap="flat" cmpd="sng" algn="ctr">
+                      <a:solidFill>
+                        <a:srgbClr val="BFBFBF"/>
+                      </a:solidFill>
+                      <a:prstDash val="solid"/>
+                      <a:round/>
+                      <a:headEnd type="none" w="med" len="med"/>
+                      <a:tailEnd type="none" w="med" len="med"/>
+                    </a:lnR>
+                    <a:lnT w="6350" cap="flat" cmpd="sng" algn="ctr">
+                      <a:solidFill>
+                        <a:srgbClr val="BFBFBF"/>
+                      </a:solidFill>
+                      <a:prstDash val="solid"/>
+                      <a:round/>
+                      <a:headEnd type="none" w="med" len="med"/>
+                      <a:tailEnd type="none" w="med" len="med"/>
+                    </a:lnT>
+                    <a:lnB w="6350" cap="flat" cmpd="sng" algn="ctr">
+                      <a:solidFill>
+                        <a:srgbClr val="BFBFBF"/>
+                      </a:solidFill>
+                      <a:prstDash val="solid"/>
+                      <a:round/>
+                      <a:headEnd type="none" w="med" len="med"/>
+                      <a:tailEnd type="none" w="med" len="med"/>
+                    </a:lnB>
+                    <a:solidFill>
+                      <a:srgbClr val="FFFFFF"/>
+                    </a:solidFill>
+                  </a:tcPr>
+                </a:tc>
+                <a:tc>
+                  <a:txBody>
+                    <a:bodyPr/>
+                    <a:lstStyle/>
+                    <a:p>
+                      <a:pPr marL="0" indent="0" algn="l">
+                        <a:buNone/>
+                      </a:pPr>
+                      <a:r>
+                        <a:rPr lang="en-US" sz="1300" dirty="0">
+                          <a:solidFill>
+                            <a:srgbClr val="000000"/>
+                          </a:solidFill>
+                          <a:latin typeface="Calibri" pitchFamily="34" charset="0"/>
+                          <a:ea typeface="Calibri" pitchFamily="34" charset="-122"/>
+                          <a:cs typeface="Calibri" pitchFamily="34" charset="-120"/>
+                        </a:rPr>
+                        <a:t>Modular synthetic gene circuit design via BioNetGen</a:t>
+                      </a:r>
+                      <a:endParaRPr lang="en-US" sz="1300" dirty="0">
+                        <a:latin typeface="Calibri" charset="0"/>
+                        <a:ea typeface="Calibri" charset="0"/>
+                        <a:cs typeface="Calibri" charset="0"/>
+                      </a:endParaRPr>
+                    </a:p>
+                  </a:txBody>
+                  <a:tcPr marL="50800" marR="50800" marT="12700" marB="12700" anchor="ctr">
+                    <a:lnL w="6350" cap="flat" cmpd="sng" algn="ctr">
+                      <a:solidFill>
+                        <a:srgbClr val="BFBFBF"/>
+                      </a:solidFill>
+                      <a:prstDash val="solid"/>
+                      <a:round/>
+                      <a:headEnd type="none" w="med" len="med"/>
+                      <a:tailEnd type="none" w="med" len="med"/>
+                    </a:lnL>
+                    <a:lnR w="6350" cap="flat" cmpd="sng" algn="ctr">
+                      <a:solidFill>
+                        <a:srgbClr val="BFBFBF"/>
+                      </a:solidFill>
+                      <a:prstDash val="solid"/>
+                      <a:round/>
+                      <a:headEnd type="none" w="med" len="med"/>
+                      <a:tailEnd type="none" w="med" len="med"/>
+                    </a:lnR>
+                    <a:lnT w="6350" cap="flat" cmpd="sng" algn="ctr">
+                      <a:solidFill>
+                        <a:srgbClr val="BFBFBF"/>
+                      </a:solidFill>
+                      <a:prstDash val="solid"/>
+                      <a:round/>
+                      <a:headEnd type="none" w="med" len="med"/>
+                      <a:tailEnd type="none" w="med" len="med"/>
+                    </a:lnT>
+                    <a:lnB w="6350" cap="flat" cmpd="sng" algn="ctr">
+                      <a:solidFill>
+                        <a:srgbClr val="BFBFBF"/>
+                      </a:solidFill>
+                      <a:prstDash val="solid"/>
+                      <a:round/>
+                      <a:headEnd type="none" w="med" len="med"/>
+                      <a:tailEnd type="none" w="med" len="med"/>
+                    </a:lnB>
+                    <a:solidFill>
+                      <a:srgbClr val="FFFFFF"/>
+                    </a:solidFill>
+                  </a:tcPr>
+                </a:tc>
+                <a:extLst>
+                  <a:ext uri="{0D108BD9-81ED-4DB2-BD59-A6C34878D82A}">
+                    <a16:rowId xmlns:a16="http://schemas.microsoft.com/office/drawing/2014/main" val="10007"/>
+                  </a:ext>
+                </a:extLst>
               </a:tr>
             </a:tbl>
           </a:graphicData>
@@ -3032,6 +3270,7 @@
         <a:solidFill>
           <a:srgbClr val="FFFFFF"/>
         </a:solidFill>
+        <a:effectLst/>
       </p:bgPr>
     </p:bg>
     <p:spTree>
@@ -3069,7 +3308,7 @@
           <a:bodyPr wrap="square" lIns="0" tIns="0" rIns="0" bIns="0" rtlCol="0" anchor="ctr"/>
           <a:lstStyle/>
           <a:p>
-            <a:pPr algn="l" indent="0" marL="0">
+            <a:pPr marL="0" indent="0" algn="l">
               <a:buNone/>
             </a:pPr>
             <a:r>
@@ -3108,7 +3347,7 @@
           <a:bodyPr wrap="square" lIns="0" tIns="0" rIns="0" bIns="0" rtlCol="0" anchor="ctr"/>
           <a:lstStyle/>
           <a:p>
-            <a:pPr algn="l" indent="0" marL="0">
+            <a:pPr marL="0" indent="0" algn="l">
               <a:buNone/>
             </a:pPr>
             <a:r>
@@ -3128,7 +3367,7 @@
       </p:sp>
       <p:graphicFrame>
         <p:nvGraphicFramePr>
-          <p:cNvPr id="3" name="Table 0"/>
+          <p:cNvPr id="4" name="Table 0"/>
           <p:cNvGraphicFramePr>
             <a:graphicFrameLocks noGrp="1"/>
           </p:cNvGraphicFramePr>
@@ -3142,16 +3381,34 @@
         </p:nvGraphicFramePr>
         <p:xfrm>
           <a:off x="457200" y="1325880"/>
-          <a:ext cx="11247120" cy="914400"/>
+          <a:ext cx="11247120" cy="4114800"/>
         </p:xfrm>
         <a:graphic>
           <a:graphicData uri="http://schemas.openxmlformats.org/drawingml/2006/table">
             <a:tbl>
               <a:tblPr/>
               <a:tblGrid>
-                <a:gridCol w="2651760"/>
-                <a:gridCol w="2011680"/>
-                <a:gridCol w="6583680"/>
+                <a:gridCol w="2651760">
+                  <a:extLst>
+                    <a:ext uri="{9D8B030D-6E8A-4147-A177-3AD203B41FA5}">
+                      <a16:colId xmlns:a16="http://schemas.microsoft.com/office/drawing/2014/main" val="20000"/>
+                    </a:ext>
+                  </a:extLst>
+                </a:gridCol>
+                <a:gridCol w="2011680">
+                  <a:extLst>
+                    <a:ext uri="{9D8B030D-6E8A-4147-A177-3AD203B41FA5}">
+                      <a16:colId xmlns:a16="http://schemas.microsoft.com/office/drawing/2014/main" val="20001"/>
+                    </a:ext>
+                  </a:extLst>
+                </a:gridCol>
+                <a:gridCol w="6583680">
+                  <a:extLst>
+                    <a:ext uri="{9D8B030D-6E8A-4147-A177-3AD203B41FA5}">
+                      <a16:colId xmlns:a16="http://schemas.microsoft.com/office/drawing/2014/main" val="20002"/>
+                    </a:ext>
+                  </a:extLst>
+                </a:gridCol>
               </a:tblGrid>
               <a:tr h="457200">
                 <a:tc>
@@ -3159,7 +3416,7 @@
                     <a:bodyPr/>
                     <a:lstStyle/>
                     <a:p>
-                      <a:pPr algn="l" indent="0" marL="0">
+                      <a:pPr marL="0" indent="0" algn="l">
                         <a:buNone/>
                       </a:pPr>
                       <a:r>
@@ -3227,7 +3484,7 @@
                     <a:bodyPr/>
                     <a:lstStyle/>
                     <a:p>
-                      <a:pPr algn="l" indent="0" marL="0">
+                      <a:pPr marL="0" indent="0" algn="l">
                         <a:buNone/>
                       </a:pPr>
                       <a:r>
@@ -3295,7 +3552,7 @@
                     <a:bodyPr/>
                     <a:lstStyle/>
                     <a:p>
-                      <a:pPr algn="l" indent="0" marL="0">
+                      <a:pPr marL="0" indent="0" algn="l">
                         <a:buNone/>
                       </a:pPr>
                       <a:r>
@@ -3358,6 +3615,11 @@
                     </a:solidFill>
                   </a:tcPr>
                 </a:tc>
+                <a:extLst>
+                  <a:ext uri="{0D108BD9-81ED-4DB2-BD59-A6C34878D82A}">
+                    <a16:rowId xmlns:a16="http://schemas.microsoft.com/office/drawing/2014/main" val="10000"/>
+                  </a:ext>
+                </a:extLst>
               </a:tr>
               <a:tr h="457200">
                 <a:tc>
@@ -3365,7 +3627,7 @@
                     <a:bodyPr/>
                     <a:lstStyle/>
                     <a:p>
-                      <a:pPr algn="l" indent="0" marL="0">
+                      <a:pPr marL="0" indent="0" algn="l">
                         <a:buNone/>
                       </a:pPr>
                       <a:r>
@@ -3433,7 +3695,7 @@
                     <a:bodyPr/>
                     <a:lstStyle/>
                     <a:p>
-                      <a:pPr algn="l" indent="0" marL="0">
+                      <a:pPr marL="0" indent="0" algn="l">
                         <a:buNone/>
                       </a:pPr>
                       <a:r>
@@ -3501,7 +3763,7 @@
                     <a:bodyPr/>
                     <a:lstStyle/>
                     <a:p>
-                      <a:pPr algn="l" indent="0" marL="0">
+                      <a:pPr marL="0" indent="0" algn="l">
                         <a:buNone/>
                       </a:pPr>
                       <a:r>
@@ -3564,6 +3826,11 @@
                     </a:solidFill>
                   </a:tcPr>
                 </a:tc>
+                <a:extLst>
+                  <a:ext uri="{0D108BD9-81ED-4DB2-BD59-A6C34878D82A}">
+                    <a16:rowId xmlns:a16="http://schemas.microsoft.com/office/drawing/2014/main" val="10001"/>
+                  </a:ext>
+                </a:extLst>
               </a:tr>
               <a:tr h="457200">
                 <a:tc>
@@ -3571,7 +3838,7 @@
                     <a:bodyPr/>
                     <a:lstStyle/>
                     <a:p>
-                      <a:pPr algn="l" indent="0" marL="0">
+                      <a:pPr marL="0" indent="0" algn="l">
                         <a:buNone/>
                       </a:pPr>
                       <a:r>
@@ -3639,7 +3906,7 @@
                     <a:bodyPr/>
                     <a:lstStyle/>
                     <a:p>
-                      <a:pPr algn="l" indent="0" marL="0">
+                      <a:pPr marL="0" indent="0" algn="l">
                         <a:buNone/>
                       </a:pPr>
                       <a:r>
@@ -3707,7 +3974,7 @@
                     <a:bodyPr/>
                     <a:lstStyle/>
                     <a:p>
-                      <a:pPr algn="l" indent="0" marL="0">
+                      <a:pPr marL="0" indent="0" algn="l">
                         <a:buNone/>
                       </a:pPr>
                       <a:r>
@@ -3770,6 +4037,11 @@
                     </a:solidFill>
                   </a:tcPr>
                 </a:tc>
+                <a:extLst>
+                  <a:ext uri="{0D108BD9-81ED-4DB2-BD59-A6C34878D82A}">
+                    <a16:rowId xmlns:a16="http://schemas.microsoft.com/office/drawing/2014/main" val="10002"/>
+                  </a:ext>
+                </a:extLst>
               </a:tr>
               <a:tr h="457200">
                 <a:tc>
@@ -3777,7 +4049,7 @@
                     <a:bodyPr/>
                     <a:lstStyle/>
                     <a:p>
-                      <a:pPr algn="l" indent="0" marL="0">
+                      <a:pPr marL="0" indent="0" algn="l">
                         <a:buNone/>
                       </a:pPr>
                       <a:r>
@@ -3845,7 +4117,7 @@
                     <a:bodyPr/>
                     <a:lstStyle/>
                     <a:p>
-                      <a:pPr algn="l" indent="0" marL="0">
+                      <a:pPr marL="0" indent="0" algn="l">
                         <a:buNone/>
                       </a:pPr>
                       <a:r>
@@ -3913,7 +4185,7 @@
                     <a:bodyPr/>
                     <a:lstStyle/>
                     <a:p>
-                      <a:pPr algn="l" indent="0" marL="0">
+                      <a:pPr marL="0" indent="0" algn="l">
                         <a:buNone/>
                       </a:pPr>
                       <a:r>
@@ -3976,6 +4248,11 @@
                     </a:solidFill>
                   </a:tcPr>
                 </a:tc>
+                <a:extLst>
+                  <a:ext uri="{0D108BD9-81ED-4DB2-BD59-A6C34878D82A}">
+                    <a16:rowId xmlns:a16="http://schemas.microsoft.com/office/drawing/2014/main" val="10003"/>
+                  </a:ext>
+                </a:extLst>
               </a:tr>
               <a:tr h="457200">
                 <a:tc>
@@ -3983,7 +4260,7 @@
                     <a:bodyPr/>
                     <a:lstStyle/>
                     <a:p>
-                      <a:pPr algn="l" indent="0" marL="0">
+                      <a:pPr marL="0" indent="0" algn="l">
                         <a:buNone/>
                       </a:pPr>
                       <a:r>
@@ -4051,7 +4328,7 @@
                     <a:bodyPr/>
                     <a:lstStyle/>
                     <a:p>
-                      <a:pPr algn="l" indent="0" marL="0">
+                      <a:pPr marL="0" indent="0" algn="l">
                         <a:buNone/>
                       </a:pPr>
                       <a:r>
@@ -4119,7 +4396,7 @@
                     <a:bodyPr/>
                     <a:lstStyle/>
                     <a:p>
-                      <a:pPr algn="l" indent="0" marL="0">
+                      <a:pPr marL="0" indent="0" algn="l">
                         <a:buNone/>
                       </a:pPr>
                       <a:r>
@@ -4182,6 +4459,11 @@
                     </a:solidFill>
                   </a:tcPr>
                 </a:tc>
+                <a:extLst>
+                  <a:ext uri="{0D108BD9-81ED-4DB2-BD59-A6C34878D82A}">
+                    <a16:rowId xmlns:a16="http://schemas.microsoft.com/office/drawing/2014/main" val="10004"/>
+                  </a:ext>
+                </a:extLst>
               </a:tr>
               <a:tr h="457200">
                 <a:tc>
@@ -4189,7 +4471,7 @@
                     <a:bodyPr/>
                     <a:lstStyle/>
                     <a:p>
-                      <a:pPr algn="l" indent="0" marL="0">
+                      <a:pPr marL="0" indent="0" algn="l">
                         <a:buNone/>
                       </a:pPr>
                       <a:r>
@@ -4257,7 +4539,7 @@
                     <a:bodyPr/>
                     <a:lstStyle/>
                     <a:p>
-                      <a:pPr algn="l" indent="0" marL="0">
+                      <a:pPr marL="0" indent="0" algn="l">
                         <a:buNone/>
                       </a:pPr>
                       <a:r>
@@ -4325,7 +4607,7 @@
                     <a:bodyPr/>
                     <a:lstStyle/>
                     <a:p>
-                      <a:pPr algn="l" indent="0" marL="0">
+                      <a:pPr marL="0" indent="0" algn="l">
                         <a:buNone/>
                       </a:pPr>
                       <a:r>
@@ -4388,6 +4670,11 @@
                     </a:solidFill>
                   </a:tcPr>
                 </a:tc>
+                <a:extLst>
+                  <a:ext uri="{0D108BD9-81ED-4DB2-BD59-A6C34878D82A}">
+                    <a16:rowId xmlns:a16="http://schemas.microsoft.com/office/drawing/2014/main" val="10005"/>
+                  </a:ext>
+                </a:extLst>
               </a:tr>
               <a:tr h="457200">
                 <a:tc>
@@ -4395,7 +4682,7 @@
                     <a:bodyPr/>
                     <a:lstStyle/>
                     <a:p>
-                      <a:pPr algn="l" indent="0" marL="0">
+                      <a:pPr marL="0" indent="0" algn="l">
                         <a:buNone/>
                       </a:pPr>
                       <a:r>
@@ -4463,7 +4750,7 @@
                     <a:bodyPr/>
                     <a:lstStyle/>
                     <a:p>
-                      <a:pPr algn="l" indent="0" marL="0">
+                      <a:pPr marL="0" indent="0" algn="l">
                         <a:buNone/>
                       </a:pPr>
                       <a:r>
@@ -4531,7 +4818,7 @@
                     <a:bodyPr/>
                     <a:lstStyle/>
                     <a:p>
-                      <a:pPr algn="l" indent="0" marL="0">
+                      <a:pPr marL="0" indent="0" algn="l">
                         <a:buNone/>
                       </a:pPr>
                       <a:r>
@@ -4594,6 +4881,11 @@
                     </a:solidFill>
                   </a:tcPr>
                 </a:tc>
+                <a:extLst>
+                  <a:ext uri="{0D108BD9-81ED-4DB2-BD59-A6C34878D82A}">
+                    <a16:rowId xmlns:a16="http://schemas.microsoft.com/office/drawing/2014/main" val="10006"/>
+                  </a:ext>
+                </a:extLst>
               </a:tr>
               <a:tr h="457200">
                 <a:tc>
@@ -4601,7 +4893,7 @@
                     <a:bodyPr/>
                     <a:lstStyle/>
                     <a:p>
-                      <a:pPr algn="l" indent="0" marL="0">
+                      <a:pPr marL="0" indent="0" algn="l">
                         <a:buNone/>
                       </a:pPr>
                       <a:r>
@@ -4669,7 +4961,7 @@
                     <a:bodyPr/>
                     <a:lstStyle/>
                     <a:p>
-                      <a:pPr algn="l" indent="0" marL="0">
+                      <a:pPr marL="0" indent="0" algn="l">
                         <a:buNone/>
                       </a:pPr>
                       <a:r>
@@ -4737,7 +5029,7 @@
                     <a:bodyPr/>
                     <a:lstStyle/>
                     <a:p>
-                      <a:pPr algn="l" indent="0" marL="0">
+                      <a:pPr marL="0" indent="0" algn="l">
                         <a:buNone/>
                       </a:pPr>
                       <a:r>
@@ -4800,6 +5092,11 @@
                     </a:solidFill>
                   </a:tcPr>
                 </a:tc>
+                <a:extLst>
+                  <a:ext uri="{0D108BD9-81ED-4DB2-BD59-A6C34878D82A}">
+                    <a16:rowId xmlns:a16="http://schemas.microsoft.com/office/drawing/2014/main" val="10007"/>
+                  </a:ext>
+                </a:extLst>
               </a:tr>
               <a:tr h="457200">
                 <a:tc>
@@ -4807,7 +5104,7 @@
                     <a:bodyPr/>
                     <a:lstStyle/>
                     <a:p>
-                      <a:pPr algn="l" indent="0" marL="0">
+                      <a:pPr marL="0" indent="0" algn="l">
                         <a:buNone/>
                       </a:pPr>
                       <a:r>
@@ -4875,7 +5172,7 @@
                     <a:bodyPr/>
                     <a:lstStyle/>
                     <a:p>
-                      <a:pPr algn="l" indent="0" marL="0">
+                      <a:pPr marL="0" indent="0" algn="l">
                         <a:buNone/>
                       </a:pPr>
                       <a:r>
@@ -4943,7 +5240,7 @@
                     <a:bodyPr/>
                     <a:lstStyle/>
                     <a:p>
-                      <a:pPr algn="l" indent="0" marL="0">
+                      <a:pPr marL="0" indent="0" algn="l">
                         <a:buNone/>
                       </a:pPr>
                       <a:r>
@@ -5006,6 +5303,11 @@
                     </a:solidFill>
                   </a:tcPr>
                 </a:tc>
+                <a:extLst>
+                  <a:ext uri="{0D108BD9-81ED-4DB2-BD59-A6C34878D82A}">
+                    <a16:rowId xmlns:a16="http://schemas.microsoft.com/office/drawing/2014/main" val="10008"/>
+                  </a:ext>
+                </a:extLst>
               </a:tr>
             </a:tbl>
           </a:graphicData>
@@ -5027,6 +5329,7 @@
         <a:solidFill>
           <a:srgbClr val="FFFFFF"/>
         </a:solidFill>
+        <a:effectLst/>
       </p:bgPr>
     </p:bg>
     <p:spTree>
@@ -5064,7 +5367,7 @@
           <a:bodyPr wrap="square" lIns="0" tIns="0" rIns="0" bIns="0" rtlCol="0" anchor="ctr"/>
           <a:lstStyle/>
           <a:p>
-            <a:pPr algn="l" indent="0" marL="0">
+            <a:pPr marL="0" indent="0" algn="l">
               <a:buNone/>
             </a:pPr>
             <a:r>
@@ -5103,7 +5406,7 @@
           <a:bodyPr wrap="square" lIns="0" tIns="0" rIns="0" bIns="0" rtlCol="0" anchor="ctr"/>
           <a:lstStyle/>
           <a:p>
-            <a:pPr algn="l" indent="0" marL="0">
+            <a:pPr marL="0" indent="0" algn="l">
               <a:buNone/>
             </a:pPr>
             <a:r>
@@ -5130,23 +5433,41 @@
           <p:nvPr>
             <p:extLst>
               <p:ext uri="{D42A27DB-BD31-4B8C-83A1-F6EECF244321}">
-                <p14:modId xmlns:p14="http://schemas.microsoft.com/office/powerpoint/2010/main" val="1579011935"/>
+                <p14:modId xmlns:p14="http://schemas.microsoft.com/office/powerpoint/2010/main" val="2997837959"/>
               </p:ext>
             </p:extLst>
           </p:nvPr>
         </p:nvGraphicFramePr>
         <p:xfrm>
           <a:off x="457200" y="1234440"/>
-          <a:ext cx="11247120" cy="914400"/>
+          <a:ext cx="11247120" cy="4727448"/>
         </p:xfrm>
         <a:graphic>
           <a:graphicData uri="http://schemas.openxmlformats.org/drawingml/2006/table">
             <a:tbl>
               <a:tblPr/>
               <a:tblGrid>
-                <a:gridCol w="2651760"/>
-                <a:gridCol w="1737360"/>
-                <a:gridCol w="6858000"/>
+                <a:gridCol w="2651760">
+                  <a:extLst>
+                    <a:ext uri="{9D8B030D-6E8A-4147-A177-3AD203B41FA5}">
+                      <a16:colId xmlns:a16="http://schemas.microsoft.com/office/drawing/2014/main" val="20000"/>
+                    </a:ext>
+                  </a:extLst>
+                </a:gridCol>
+                <a:gridCol w="1737360">
+                  <a:extLst>
+                    <a:ext uri="{9D8B030D-6E8A-4147-A177-3AD203B41FA5}">
+                      <a16:colId xmlns:a16="http://schemas.microsoft.com/office/drawing/2014/main" val="20001"/>
+                    </a:ext>
+                  </a:extLst>
+                </a:gridCol>
+                <a:gridCol w="6858000">
+                  <a:extLst>
+                    <a:ext uri="{9D8B030D-6E8A-4147-A177-3AD203B41FA5}">
+                      <a16:colId xmlns:a16="http://schemas.microsoft.com/office/drawing/2014/main" val="20002"/>
+                    </a:ext>
+                  </a:extLst>
+                </a:gridCol>
               </a:tblGrid>
               <a:tr h="214884">
                 <a:tc>
@@ -5154,7 +5475,7 @@
                     <a:bodyPr/>
                     <a:lstStyle/>
                     <a:p>
-                      <a:pPr algn="l" indent="0" marL="0">
+                      <a:pPr marL="0" indent="0" algn="l">
                         <a:buNone/>
                       </a:pPr>
                       <a:r>
@@ -5222,7 +5543,7 @@
                     <a:bodyPr/>
                     <a:lstStyle/>
                     <a:p>
-                      <a:pPr algn="l" indent="0" marL="0">
+                      <a:pPr marL="0" indent="0" algn="l">
                         <a:buNone/>
                       </a:pPr>
                       <a:r>
@@ -5290,7 +5611,7 @@
                     <a:bodyPr/>
                     <a:lstStyle/>
                     <a:p>
-                      <a:pPr algn="l" indent="0" marL="0">
+                      <a:pPr marL="0" indent="0" algn="l">
                         <a:buNone/>
                       </a:pPr>
                       <a:r>
@@ -5353,6 +5674,11 @@
                     </a:solidFill>
                   </a:tcPr>
                 </a:tc>
+                <a:extLst>
+                  <a:ext uri="{0D108BD9-81ED-4DB2-BD59-A6C34878D82A}">
+                    <a16:rowId xmlns:a16="http://schemas.microsoft.com/office/drawing/2014/main" val="10000"/>
+                  </a:ext>
+                </a:extLst>
               </a:tr>
               <a:tr h="214884">
                 <a:tc gridSpan="3">
@@ -5360,7 +5686,7 @@
                     <a:bodyPr/>
                     <a:lstStyle/>
                     <a:p>
-                      <a:pPr algn="l" indent="0" marL="0">
+                      <a:pPr marL="0" indent="0" algn="l">
                         <a:buNone/>
                       </a:pPr>
                       <a:r>
@@ -5372,7 +5698,7 @@
                           <a:ea typeface="Calibri" pitchFamily="34" charset="-122"/>
                           <a:cs typeface="Calibri" pitchFamily="34" charset="-120"/>
                         </a:rPr>
-                        <a:t>Core engine and language</a:t>
+                        <a:t>    Core engine and language</a:t>
                       </a:r>
                       <a:endParaRPr lang="en-US" sz="1000" dirty="0">
                         <a:latin typeface="Calibri" charset="0"/>
@@ -5424,11 +5750,30 @@
                   </a:tcPr>
                 </a:tc>
                 <a:tc hMerge="1">
+                  <a:txBody>
+                    <a:bodyPr/>
+                    <a:lstStyle/>
+                    <a:p>
+                      <a:endParaRPr lang="en-US"/>
+                    </a:p>
+                  </a:txBody>
                   <a:tcPr/>
                 </a:tc>
                 <a:tc hMerge="1">
+                  <a:txBody>
+                    <a:bodyPr/>
+                    <a:lstStyle/>
+                    <a:p>
+                      <a:endParaRPr lang="en-US"/>
+                    </a:p>
+                  </a:txBody>
                   <a:tcPr/>
                 </a:tc>
+                <a:extLst>
+                  <a:ext uri="{0D108BD9-81ED-4DB2-BD59-A6C34878D82A}">
+                    <a16:rowId xmlns:a16="http://schemas.microsoft.com/office/drawing/2014/main" val="10001"/>
+                  </a:ext>
+                </a:extLst>
               </a:tr>
               <a:tr h="214884">
                 <a:tc>
@@ -5436,7 +5781,7 @@
                     <a:bodyPr/>
                     <a:lstStyle/>
                     <a:p>
-                      <a:pPr algn="l" indent="0" marL="0">
+                      <a:pPr marL="0" indent="0" algn="l">
                         <a:buNone/>
                       </a:pPr>
                       <a:r>
@@ -5504,7 +5849,7 @@
                     <a:bodyPr/>
                     <a:lstStyle/>
                     <a:p>
-                      <a:pPr algn="l" indent="0" marL="0">
+                      <a:pPr marL="0" indent="0" algn="l">
                         <a:buNone/>
                       </a:pPr>
                       <a:r>
@@ -5572,7 +5917,7 @@
                     <a:bodyPr/>
                     <a:lstStyle/>
                     <a:p>
-                      <a:pPr algn="l" indent="0" marL="0">
+                      <a:pPr marL="0" indent="0" algn="l">
                         <a:buNone/>
                       </a:pPr>
                       <a:r>
@@ -5635,6 +5980,11 @@
                     </a:solidFill>
                   </a:tcPr>
                 </a:tc>
+                <a:extLst>
+                  <a:ext uri="{0D108BD9-81ED-4DB2-BD59-A6C34878D82A}">
+                    <a16:rowId xmlns:a16="http://schemas.microsoft.com/office/drawing/2014/main" val="10002"/>
+                  </a:ext>
+                </a:extLst>
               </a:tr>
               <a:tr h="214884">
                 <a:tc>
@@ -5642,7 +5992,7 @@
                     <a:bodyPr/>
                     <a:lstStyle/>
                     <a:p>
-                      <a:pPr algn="l" indent="0" marL="0">
+                      <a:pPr marL="0" indent="0" algn="l">
                         <a:buNone/>
                       </a:pPr>
                       <a:r>
@@ -5710,7 +6060,7 @@
                     <a:bodyPr/>
                     <a:lstStyle/>
                     <a:p>
-                      <a:pPr algn="l" indent="0" marL="0">
+                      <a:pPr marL="0" indent="0" algn="l">
                         <a:buNone/>
                       </a:pPr>
                       <a:r>
@@ -5778,7 +6128,7 @@
                     <a:bodyPr/>
                     <a:lstStyle/>
                     <a:p>
-                      <a:pPr algn="l" indent="0" marL="0">
+                      <a:pPr marL="0" indent="0" algn="l">
                         <a:buNone/>
                       </a:pPr>
                       <a:r>
@@ -5841,6 +6191,11 @@
                     </a:solidFill>
                   </a:tcPr>
                 </a:tc>
+                <a:extLst>
+                  <a:ext uri="{0D108BD9-81ED-4DB2-BD59-A6C34878D82A}">
+                    <a16:rowId xmlns:a16="http://schemas.microsoft.com/office/drawing/2014/main" val="10003"/>
+                  </a:ext>
+                </a:extLst>
               </a:tr>
               <a:tr h="214884">
                 <a:tc>
@@ -5848,7 +6203,7 @@
                     <a:bodyPr/>
                     <a:lstStyle/>
                     <a:p>
-                      <a:pPr algn="l" indent="0" marL="0">
+                      <a:pPr marL="0" indent="0" algn="l">
                         <a:buNone/>
                       </a:pPr>
                       <a:r>
@@ -5916,7 +6271,7 @@
                     <a:bodyPr/>
                     <a:lstStyle/>
                     <a:p>
-                      <a:pPr algn="l" indent="0" marL="0">
+                      <a:pPr marL="0" indent="0" algn="l">
                         <a:buNone/>
                       </a:pPr>
                       <a:r>
@@ -5984,7 +6339,7 @@
                     <a:bodyPr/>
                     <a:lstStyle/>
                     <a:p>
-                      <a:pPr algn="l" indent="0" marL="0">
+                      <a:pPr marL="0" indent="0" algn="l">
                         <a:buNone/>
                       </a:pPr>
                       <a:r>
@@ -6047,6 +6402,11 @@
                     </a:solidFill>
                   </a:tcPr>
                 </a:tc>
+                <a:extLst>
+                  <a:ext uri="{0D108BD9-81ED-4DB2-BD59-A6C34878D82A}">
+                    <a16:rowId xmlns:a16="http://schemas.microsoft.com/office/drawing/2014/main" val="10004"/>
+                  </a:ext>
+                </a:extLst>
               </a:tr>
               <a:tr h="214884">
                 <a:tc gridSpan="3">
@@ -6054,7 +6414,7 @@
                     <a:bodyPr/>
                     <a:lstStyle/>
                     <a:p>
-                      <a:pPr algn="l" indent="0" marL="0">
+                      <a:pPr marL="0" indent="0" algn="l">
                         <a:buNone/>
                       </a:pPr>
                       <a:r>
@@ -6066,7 +6426,7 @@
                           <a:ea typeface="Calibri" pitchFamily="34" charset="-122"/>
                           <a:cs typeface="Calibri" pitchFamily="34" charset="-120"/>
                         </a:rPr>
-                        <a:t>Interfaces and editors</a:t>
+                        <a:t>    Interfaces and editors</a:t>
                       </a:r>
                       <a:endParaRPr lang="en-US" sz="1000" dirty="0">
                         <a:latin typeface="Calibri" charset="0"/>
@@ -6118,11 +6478,30 @@
                   </a:tcPr>
                 </a:tc>
                 <a:tc hMerge="1">
+                  <a:txBody>
+                    <a:bodyPr/>
+                    <a:lstStyle/>
+                    <a:p>
+                      <a:endParaRPr lang="en-US"/>
+                    </a:p>
+                  </a:txBody>
                   <a:tcPr/>
                 </a:tc>
                 <a:tc hMerge="1">
+                  <a:txBody>
+                    <a:bodyPr/>
+                    <a:lstStyle/>
+                    <a:p>
+                      <a:endParaRPr lang="en-US"/>
+                    </a:p>
+                  </a:txBody>
                   <a:tcPr/>
                 </a:tc>
+                <a:extLst>
+                  <a:ext uri="{0D108BD9-81ED-4DB2-BD59-A6C34878D82A}">
+                    <a16:rowId xmlns:a16="http://schemas.microsoft.com/office/drawing/2014/main" val="10005"/>
+                  </a:ext>
+                </a:extLst>
               </a:tr>
               <a:tr h="214884">
                 <a:tc>
@@ -6130,7 +6509,7 @@
                     <a:bodyPr/>
                     <a:lstStyle/>
                     <a:p>
-                      <a:pPr algn="l" indent="0" marL="0">
+                      <a:pPr marL="0" indent="0" algn="l">
                         <a:buNone/>
                       </a:pPr>
                       <a:r>
@@ -6198,7 +6577,7 @@
                     <a:bodyPr/>
                     <a:lstStyle/>
                     <a:p>
-                      <a:pPr algn="l" indent="0" marL="0">
+                      <a:pPr marL="0" indent="0" algn="l">
                         <a:buNone/>
                       </a:pPr>
                       <a:r>
@@ -6266,7 +6645,7 @@
                     <a:bodyPr/>
                     <a:lstStyle/>
                     <a:p>
-                      <a:pPr algn="l" indent="0" marL="0">
+                      <a:pPr marL="0" indent="0" algn="l">
                         <a:buNone/>
                       </a:pPr>
                       <a:r>
@@ -6329,6 +6708,11 @@
                     </a:solidFill>
                   </a:tcPr>
                 </a:tc>
+                <a:extLst>
+                  <a:ext uri="{0D108BD9-81ED-4DB2-BD59-A6C34878D82A}">
+                    <a16:rowId xmlns:a16="http://schemas.microsoft.com/office/drawing/2014/main" val="10006"/>
+                  </a:ext>
+                </a:extLst>
               </a:tr>
               <a:tr h="214884">
                 <a:tc>
@@ -6336,7 +6720,7 @@
                     <a:bodyPr/>
                     <a:lstStyle/>
                     <a:p>
-                      <a:pPr algn="l" indent="0" marL="0">
+                      <a:pPr marL="0" indent="0" algn="l">
                         <a:buNone/>
                       </a:pPr>
                       <a:r>
@@ -6404,7 +6788,7 @@
                     <a:bodyPr/>
                     <a:lstStyle/>
                     <a:p>
-                      <a:pPr algn="l" indent="0" marL="0">
+                      <a:pPr marL="0" indent="0" algn="l">
                         <a:buNone/>
                       </a:pPr>
                       <a:r>
@@ -6472,7 +6856,7 @@
                     <a:bodyPr/>
                     <a:lstStyle/>
                     <a:p>
-                      <a:pPr algn="l" indent="0" marL="0">
+                      <a:pPr marL="0" indent="0" algn="l">
                         <a:buNone/>
                       </a:pPr>
                       <a:r>
@@ -6535,6 +6919,11 @@
                     </a:solidFill>
                   </a:tcPr>
                 </a:tc>
+                <a:extLst>
+                  <a:ext uri="{0D108BD9-81ED-4DB2-BD59-A6C34878D82A}">
+                    <a16:rowId xmlns:a16="http://schemas.microsoft.com/office/drawing/2014/main" val="10007"/>
+                  </a:ext>
+                </a:extLst>
               </a:tr>
               <a:tr h="214884">
                 <a:tc>
@@ -6542,7 +6931,7 @@
                     <a:bodyPr/>
                     <a:lstStyle/>
                     <a:p>
-                      <a:pPr algn="l" indent="0" marL="0">
+                      <a:pPr marL="0" indent="0" algn="l">
                         <a:buNone/>
                       </a:pPr>
                       <a:r>
@@ -6610,7 +6999,7 @@
                     <a:bodyPr/>
                     <a:lstStyle/>
                     <a:p>
-                      <a:pPr algn="l" indent="0" marL="0">
+                      <a:pPr marL="0" indent="0" algn="l">
                         <a:buNone/>
                       </a:pPr>
                       <a:r>
@@ -6678,7 +7067,7 @@
                     <a:bodyPr/>
                     <a:lstStyle/>
                     <a:p>
-                      <a:pPr algn="l" indent="0" marL="0">
+                      <a:pPr marL="0" indent="0" algn="l">
                         <a:buNone/>
                       </a:pPr>
                       <a:r>
@@ -6741,6 +7130,11 @@
                     </a:solidFill>
                   </a:tcPr>
                 </a:tc>
+                <a:extLst>
+                  <a:ext uri="{0D108BD9-81ED-4DB2-BD59-A6C34878D82A}">
+                    <a16:rowId xmlns:a16="http://schemas.microsoft.com/office/drawing/2014/main" val="10008"/>
+                  </a:ext>
+                </a:extLst>
               </a:tr>
               <a:tr h="214884">
                 <a:tc>
@@ -6748,7 +7142,7 @@
                     <a:bodyPr/>
                     <a:lstStyle/>
                     <a:p>
-                      <a:pPr algn="l" indent="0" marL="0">
+                      <a:pPr marL="0" indent="0" algn="l">
                         <a:buNone/>
                       </a:pPr>
                       <a:r>
@@ -6816,7 +7210,7 @@
                     <a:bodyPr/>
                     <a:lstStyle/>
                     <a:p>
-                      <a:pPr algn="l" indent="0" marL="0">
+                      <a:pPr marL="0" indent="0" algn="l">
                         <a:buNone/>
                       </a:pPr>
                       <a:r>
@@ -6884,7 +7278,7 @@
                     <a:bodyPr/>
                     <a:lstStyle/>
                     <a:p>
-                      <a:pPr algn="l" indent="0" marL="0">
+                      <a:pPr marL="0" indent="0" algn="l">
                         <a:buNone/>
                       </a:pPr>
                       <a:r>
@@ -6947,6 +7341,11 @@
                     </a:solidFill>
                   </a:tcPr>
                 </a:tc>
+                <a:extLst>
+                  <a:ext uri="{0D108BD9-81ED-4DB2-BD59-A6C34878D82A}">
+                    <a16:rowId xmlns:a16="http://schemas.microsoft.com/office/drawing/2014/main" val="10009"/>
+                  </a:ext>
+                </a:extLst>
               </a:tr>
               <a:tr h="214884">
                 <a:tc gridSpan="3">
@@ -6954,7 +7353,7 @@
                     <a:bodyPr/>
                     <a:lstStyle/>
                     <a:p>
-                      <a:pPr algn="l" indent="0" marL="0">
+                      <a:pPr marL="0" indent="0" algn="l">
                         <a:buNone/>
                       </a:pPr>
                       <a:r>
@@ -6966,7 +7365,7 @@
                           <a:ea typeface="Calibri" pitchFamily="34" charset="-122"/>
                           <a:cs typeface="Calibri" pitchFamily="34" charset="-120"/>
                         </a:rPr>
-                        <a:t>Python and workflows</a:t>
+                        <a:t>    Python and workflows</a:t>
                       </a:r>
                       <a:endParaRPr lang="en-US" sz="1000" dirty="0">
                         <a:latin typeface="Calibri" charset="0"/>
@@ -7018,11 +7417,30 @@
                   </a:tcPr>
                 </a:tc>
                 <a:tc hMerge="1">
+                  <a:txBody>
+                    <a:bodyPr/>
+                    <a:lstStyle/>
+                    <a:p>
+                      <a:endParaRPr lang="en-US"/>
+                    </a:p>
+                  </a:txBody>
                   <a:tcPr/>
                 </a:tc>
                 <a:tc hMerge="1">
+                  <a:txBody>
+                    <a:bodyPr/>
+                    <a:lstStyle/>
+                    <a:p>
+                      <a:endParaRPr lang="en-US"/>
+                    </a:p>
+                  </a:txBody>
                   <a:tcPr/>
                 </a:tc>
+                <a:extLst>
+                  <a:ext uri="{0D108BD9-81ED-4DB2-BD59-A6C34878D82A}">
+                    <a16:rowId xmlns:a16="http://schemas.microsoft.com/office/drawing/2014/main" val="10010"/>
+                  </a:ext>
+                </a:extLst>
               </a:tr>
               <a:tr h="214884">
                 <a:tc>
@@ -7030,7 +7448,7 @@
                     <a:bodyPr/>
                     <a:lstStyle/>
                     <a:p>
-                      <a:pPr algn="l" indent="0" marL="0">
+                      <a:pPr marL="0" indent="0" algn="l">
                         <a:buNone/>
                       </a:pPr>
                       <a:r>
@@ -7098,7 +7516,7 @@
                     <a:bodyPr/>
                     <a:lstStyle/>
                     <a:p>
-                      <a:pPr algn="l" indent="0" marL="0">
+                      <a:pPr marL="0" indent="0" algn="l">
                         <a:buNone/>
                       </a:pPr>
                       <a:r>
@@ -7166,7 +7584,7 @@
                     <a:bodyPr/>
                     <a:lstStyle/>
                     <a:p>
-                      <a:pPr algn="l" indent="0" marL="0">
+                      <a:pPr marL="0" indent="0" algn="l">
                         <a:buNone/>
                       </a:pPr>
                       <a:r>
@@ -7229,6 +7647,11 @@
                     </a:solidFill>
                   </a:tcPr>
                 </a:tc>
+                <a:extLst>
+                  <a:ext uri="{0D108BD9-81ED-4DB2-BD59-A6C34878D82A}">
+                    <a16:rowId xmlns:a16="http://schemas.microsoft.com/office/drawing/2014/main" val="10011"/>
+                  </a:ext>
+                </a:extLst>
               </a:tr>
               <a:tr h="214884">
                 <a:tc>
@@ -7236,7 +7659,7 @@
                     <a:bodyPr/>
                     <a:lstStyle/>
                     <a:p>
-                      <a:pPr algn="l" indent="0" marL="0">
+                      <a:pPr marL="0" indent="0" algn="l">
                         <a:buNone/>
                       </a:pPr>
                       <a:r>
@@ -7304,7 +7727,7 @@
                     <a:bodyPr/>
                     <a:lstStyle/>
                     <a:p>
-                      <a:pPr algn="l" indent="0" marL="0">
+                      <a:pPr marL="0" indent="0" algn="l">
                         <a:buNone/>
                       </a:pPr>
                       <a:r>
@@ -7372,7 +7795,7 @@
                     <a:bodyPr/>
                     <a:lstStyle/>
                     <a:p>
-                      <a:pPr algn="l" indent="0" marL="0">
+                      <a:pPr marL="0" indent="0" algn="l">
                         <a:buNone/>
                       </a:pPr>
                       <a:r>
@@ -7435,6 +7858,11 @@
                     </a:solidFill>
                   </a:tcPr>
                 </a:tc>
+                <a:extLst>
+                  <a:ext uri="{0D108BD9-81ED-4DB2-BD59-A6C34878D82A}">
+                    <a16:rowId xmlns:a16="http://schemas.microsoft.com/office/drawing/2014/main" val="10012"/>
+                  </a:ext>
+                </a:extLst>
               </a:tr>
               <a:tr h="214884">
                 <a:tc gridSpan="3">
@@ -7442,7 +7870,7 @@
                     <a:bodyPr/>
                     <a:lstStyle/>
                     <a:p>
-                      <a:pPr algn="l" indent="0" marL="0">
+                      <a:pPr marL="0" indent="0" algn="l">
                         <a:buNone/>
                       </a:pPr>
                       <a:r>
@@ -7454,7 +7882,7 @@
                           <a:ea typeface="Calibri" pitchFamily="34" charset="-122"/>
                           <a:cs typeface="Calibri" pitchFamily="34" charset="-120"/>
                         </a:rPr>
-                        <a:t>Parameter estimation</a:t>
+                        <a:t>     Parameter estimation</a:t>
                       </a:r>
                       <a:endParaRPr lang="en-US" sz="1000" dirty="0">
                         <a:latin typeface="Calibri" charset="0"/>
@@ -7506,11 +7934,30 @@
                   </a:tcPr>
                 </a:tc>
                 <a:tc hMerge="1">
+                  <a:txBody>
+                    <a:bodyPr/>
+                    <a:lstStyle/>
+                    <a:p>
+                      <a:endParaRPr lang="en-US"/>
+                    </a:p>
+                  </a:txBody>
                   <a:tcPr/>
                 </a:tc>
                 <a:tc hMerge="1">
+                  <a:txBody>
+                    <a:bodyPr/>
+                    <a:lstStyle/>
+                    <a:p>
+                      <a:endParaRPr lang="en-US"/>
+                    </a:p>
+                  </a:txBody>
                   <a:tcPr/>
                 </a:tc>
+                <a:extLst>
+                  <a:ext uri="{0D108BD9-81ED-4DB2-BD59-A6C34878D82A}">
+                    <a16:rowId xmlns:a16="http://schemas.microsoft.com/office/drawing/2014/main" val="10013"/>
+                  </a:ext>
+                </a:extLst>
               </a:tr>
               <a:tr h="214884">
                 <a:tc>
@@ -7518,7 +7965,7 @@
                     <a:bodyPr/>
                     <a:lstStyle/>
                     <a:p>
-                      <a:pPr algn="l" indent="0" marL="0">
+                      <a:pPr marL="0" indent="0" algn="l">
                         <a:buNone/>
                       </a:pPr>
                       <a:r>
@@ -7586,7 +8033,7 @@
                     <a:bodyPr/>
                     <a:lstStyle/>
                     <a:p>
-                      <a:pPr algn="l" indent="0" marL="0">
+                      <a:pPr marL="0" indent="0" algn="l">
                         <a:buNone/>
                       </a:pPr>
                       <a:r>
@@ -7654,7 +8101,7 @@
                     <a:bodyPr/>
                     <a:lstStyle/>
                     <a:p>
-                      <a:pPr algn="l" indent="0" marL="0">
+                      <a:pPr marL="0" indent="0" algn="l">
                         <a:buNone/>
                       </a:pPr>
                       <a:r>
@@ -7717,6 +8164,11 @@
                     </a:solidFill>
                   </a:tcPr>
                 </a:tc>
+                <a:extLst>
+                  <a:ext uri="{0D108BD9-81ED-4DB2-BD59-A6C34878D82A}">
+                    <a16:rowId xmlns:a16="http://schemas.microsoft.com/office/drawing/2014/main" val="10014"/>
+                  </a:ext>
+                </a:extLst>
               </a:tr>
               <a:tr h="214884">
                 <a:tc>
@@ -7724,7 +8176,7 @@
                     <a:bodyPr/>
                     <a:lstStyle/>
                     <a:p>
-                      <a:pPr algn="l" indent="0" marL="0">
+                      <a:pPr marL="0" indent="0" algn="l">
                         <a:buNone/>
                       </a:pPr>
                       <a:r>
@@ -7792,7 +8244,7 @@
                     <a:bodyPr/>
                     <a:lstStyle/>
                     <a:p>
-                      <a:pPr algn="l" indent="0" marL="0">
+                      <a:pPr marL="0" indent="0" algn="l">
                         <a:buNone/>
                       </a:pPr>
                       <a:r>
@@ -7860,7 +8312,7 @@
                     <a:bodyPr/>
                     <a:lstStyle/>
                     <a:p>
-                      <a:pPr algn="l" indent="0" marL="0">
+                      <a:pPr marL="0" indent="0" algn="l">
                         <a:buNone/>
                       </a:pPr>
                       <a:r>
@@ -7923,6 +8375,11 @@
                     </a:solidFill>
                   </a:tcPr>
                 </a:tc>
+                <a:extLst>
+                  <a:ext uri="{0D108BD9-81ED-4DB2-BD59-A6C34878D82A}">
+                    <a16:rowId xmlns:a16="http://schemas.microsoft.com/office/drawing/2014/main" val="10015"/>
+                  </a:ext>
+                </a:extLst>
               </a:tr>
               <a:tr h="214884">
                 <a:tc gridSpan="3">
@@ -7930,7 +8387,7 @@
                     <a:bodyPr/>
                     <a:lstStyle/>
                     <a:p>
-                      <a:pPr algn="l" indent="0" marL="0">
+                      <a:pPr marL="0" indent="0" algn="l">
                         <a:buNone/>
                       </a:pPr>
                       <a:r>
@@ -7942,7 +8399,7 @@
                           <a:ea typeface="Calibri" pitchFamily="34" charset="-122"/>
                           <a:cs typeface="Calibri" pitchFamily="34" charset="-120"/>
                         </a:rPr>
-                        <a:t>Translation and interoperability</a:t>
+                        <a:t>    Translation and interoperability</a:t>
                       </a:r>
                       <a:endParaRPr lang="en-US" sz="1000" dirty="0">
                         <a:latin typeface="Calibri" charset="0"/>
@@ -7994,11 +8451,30 @@
                   </a:tcPr>
                 </a:tc>
                 <a:tc hMerge="1">
+                  <a:txBody>
+                    <a:bodyPr/>
+                    <a:lstStyle/>
+                    <a:p>
+                      <a:endParaRPr lang="en-US"/>
+                    </a:p>
+                  </a:txBody>
                   <a:tcPr/>
                 </a:tc>
                 <a:tc hMerge="1">
+                  <a:txBody>
+                    <a:bodyPr/>
+                    <a:lstStyle/>
+                    <a:p>
+                      <a:endParaRPr lang="en-US"/>
+                    </a:p>
+                  </a:txBody>
                   <a:tcPr/>
                 </a:tc>
+                <a:extLst>
+                  <a:ext uri="{0D108BD9-81ED-4DB2-BD59-A6C34878D82A}">
+                    <a16:rowId xmlns:a16="http://schemas.microsoft.com/office/drawing/2014/main" val="10016"/>
+                  </a:ext>
+                </a:extLst>
               </a:tr>
               <a:tr h="214884">
                 <a:tc>
@@ -8006,7 +8482,7 @@
                     <a:bodyPr/>
                     <a:lstStyle/>
                     <a:p>
-                      <a:pPr algn="l" indent="0" marL="0">
+                      <a:pPr marL="0" indent="0" algn="l">
                         <a:buNone/>
                       </a:pPr>
                       <a:r>
@@ -8074,7 +8550,7 @@
                     <a:bodyPr/>
                     <a:lstStyle/>
                     <a:p>
-                      <a:pPr algn="l" indent="0" marL="0">
+                      <a:pPr marL="0" indent="0" algn="l">
                         <a:buNone/>
                       </a:pPr>
                       <a:r>
@@ -8142,7 +8618,7 @@
                     <a:bodyPr/>
                     <a:lstStyle/>
                     <a:p>
-                      <a:pPr algn="l" indent="0" marL="0">
+                      <a:pPr marL="0" indent="0" algn="l">
                         <a:buNone/>
                       </a:pPr>
                       <a:r>
@@ -8205,6 +8681,11 @@
                     </a:solidFill>
                   </a:tcPr>
                 </a:tc>
+                <a:extLst>
+                  <a:ext uri="{0D108BD9-81ED-4DB2-BD59-A6C34878D82A}">
+                    <a16:rowId xmlns:a16="http://schemas.microsoft.com/office/drawing/2014/main" val="10017"/>
+                  </a:ext>
+                </a:extLst>
               </a:tr>
               <a:tr h="214884">
                 <a:tc>
@@ -8212,7 +8693,7 @@
                     <a:bodyPr/>
                     <a:lstStyle/>
                     <a:p>
-                      <a:pPr algn="l" indent="0" marL="0">
+                      <a:pPr marL="0" indent="0" algn="l">
                         <a:buNone/>
                       </a:pPr>
                       <a:r>
@@ -8280,7 +8761,7 @@
                     <a:bodyPr/>
                     <a:lstStyle/>
                     <a:p>
-                      <a:pPr algn="l" indent="0" marL="0">
+                      <a:pPr marL="0" indent="0" algn="l">
                         <a:buNone/>
                       </a:pPr>
                       <a:r>
@@ -8348,7 +8829,7 @@
                     <a:bodyPr/>
                     <a:lstStyle/>
                     <a:p>
-                      <a:pPr algn="l" indent="0" marL="0">
+                      <a:pPr marL="0" indent="0" algn="l">
                         <a:buNone/>
                       </a:pPr>
                       <a:r>
@@ -8411,6 +8892,11 @@
                     </a:solidFill>
                   </a:tcPr>
                 </a:tc>
+                <a:extLst>
+                  <a:ext uri="{0D108BD9-81ED-4DB2-BD59-A6C34878D82A}">
+                    <a16:rowId xmlns:a16="http://schemas.microsoft.com/office/drawing/2014/main" val="10018"/>
+                  </a:ext>
+                </a:extLst>
               </a:tr>
               <a:tr h="214884">
                 <a:tc gridSpan="3">
@@ -8418,7 +8904,7 @@
                     <a:bodyPr/>
                     <a:lstStyle/>
                     <a:p>
-                      <a:pPr algn="l" indent="0" marL="0">
+                      <a:pPr marL="0" indent="0" algn="l">
                         <a:buNone/>
                       </a:pPr>
                       <a:r>
@@ -8430,7 +8916,7 @@
                           <a:ea typeface="Calibri" pitchFamily="34" charset="-122"/>
                           <a:cs typeface="Calibri" pitchFamily="34" charset="-120"/>
                         </a:rPr>
-                        <a:t>Models and training</a:t>
+                        <a:t>     Models and training</a:t>
                       </a:r>
                       <a:endParaRPr lang="en-US" sz="1000" dirty="0">
                         <a:latin typeface="Calibri" charset="0"/>
@@ -8482,11 +8968,30 @@
                   </a:tcPr>
                 </a:tc>
                 <a:tc hMerge="1">
+                  <a:txBody>
+                    <a:bodyPr/>
+                    <a:lstStyle/>
+                    <a:p>
+                      <a:endParaRPr lang="en-US"/>
+                    </a:p>
+                  </a:txBody>
                   <a:tcPr/>
                 </a:tc>
                 <a:tc hMerge="1">
+                  <a:txBody>
+                    <a:bodyPr/>
+                    <a:lstStyle/>
+                    <a:p>
+                      <a:endParaRPr lang="en-US"/>
+                    </a:p>
+                  </a:txBody>
                   <a:tcPr/>
                 </a:tc>
+                <a:extLst>
+                  <a:ext uri="{0D108BD9-81ED-4DB2-BD59-A6C34878D82A}">
+                    <a16:rowId xmlns:a16="http://schemas.microsoft.com/office/drawing/2014/main" val="10019"/>
+                  </a:ext>
+                </a:extLst>
               </a:tr>
               <a:tr h="214884">
                 <a:tc>
@@ -8494,7 +8999,7 @@
                     <a:bodyPr/>
                     <a:lstStyle/>
                     <a:p>
-                      <a:pPr algn="l" indent="0" marL="0">
+                      <a:pPr marL="0" indent="0" algn="l">
                         <a:buNone/>
                       </a:pPr>
                       <a:r>
@@ -8562,7 +9067,7 @@
                     <a:bodyPr/>
                     <a:lstStyle/>
                     <a:p>
-                      <a:pPr algn="l" indent="0" marL="0">
+                      <a:pPr marL="0" indent="0" algn="l">
                         <a:buNone/>
                       </a:pPr>
                       <a:r>
@@ -8630,7 +9135,7 @@
                     <a:bodyPr/>
                     <a:lstStyle/>
                     <a:p>
-                      <a:pPr algn="l" indent="0" marL="0">
+                      <a:pPr marL="0" indent="0" algn="l">
                         <a:buNone/>
                       </a:pPr>
                       <a:r>
@@ -8693,6 +9198,11 @@
                     </a:solidFill>
                   </a:tcPr>
                 </a:tc>
+                <a:extLst>
+                  <a:ext uri="{0D108BD9-81ED-4DB2-BD59-A6C34878D82A}">
+                    <a16:rowId xmlns:a16="http://schemas.microsoft.com/office/drawing/2014/main" val="10020"/>
+                  </a:ext>
+                </a:extLst>
               </a:tr>
               <a:tr h="214884">
                 <a:tc>
@@ -8700,7 +9210,7 @@
                     <a:bodyPr/>
                     <a:lstStyle/>
                     <a:p>
-                      <a:pPr algn="l" indent="0" marL="0">
+                      <a:pPr marL="0" indent="0" algn="l">
                         <a:buNone/>
                       </a:pPr>
                       <a:r>
@@ -8768,7 +9278,7 @@
                     <a:bodyPr/>
                     <a:lstStyle/>
                     <a:p>
-                      <a:pPr algn="l" indent="0" marL="0">
+                      <a:pPr marL="0" indent="0" algn="l">
                         <a:buNone/>
                       </a:pPr>
                       <a:r>
@@ -8836,7 +9346,7 @@
                     <a:bodyPr/>
                     <a:lstStyle/>
                     <a:p>
-                      <a:pPr algn="l" indent="0" marL="0">
+                      <a:pPr marL="0" indent="0" algn="l">
                         <a:buNone/>
                       </a:pPr>
                       <a:r>
@@ -8899,6 +9409,11 @@
                     </a:solidFill>
                   </a:tcPr>
                 </a:tc>
+                <a:extLst>
+                  <a:ext uri="{0D108BD9-81ED-4DB2-BD59-A6C34878D82A}">
+                    <a16:rowId xmlns:a16="http://schemas.microsoft.com/office/drawing/2014/main" val="10021"/>
+                  </a:ext>
+                </a:extLst>
               </a:tr>
             </a:tbl>
           </a:graphicData>
@@ -9205,4 +9720,319 @@
     </a:ext>
   </a:extLst>
 </a:theme>
+</file>
+
+<file path=ppt/theme/theme2.xml><?xml version="1.0" encoding="utf-8"?>
+<a:theme xmlns:a="http://schemas.openxmlformats.org/drawingml/2006/main" name="Office Theme">
+  <a:themeElements>
+    <a:clrScheme name="Office">
+      <a:dk1>
+        <a:sysClr val="windowText" lastClr="000000"/>
+      </a:dk1>
+      <a:lt1>
+        <a:sysClr val="window" lastClr="FFFFFF"/>
+      </a:lt1>
+      <a:dk2>
+        <a:srgbClr val="0E2841"/>
+      </a:dk2>
+      <a:lt2>
+        <a:srgbClr val="E8E8E8"/>
+      </a:lt2>
+      <a:accent1>
+        <a:srgbClr val="156082"/>
+      </a:accent1>
+      <a:accent2>
+        <a:srgbClr val="E97132"/>
+      </a:accent2>
+      <a:accent3>
+        <a:srgbClr val="196B24"/>
+      </a:accent3>
+      <a:accent4>
+        <a:srgbClr val="0F9ED5"/>
+      </a:accent4>
+      <a:accent5>
+        <a:srgbClr val="A02B93"/>
+      </a:accent5>
+      <a:accent6>
+        <a:srgbClr val="4EA72E"/>
+      </a:accent6>
+      <a:hlink>
+        <a:srgbClr val="467886"/>
+      </a:hlink>
+      <a:folHlink>
+        <a:srgbClr val="96607D"/>
+      </a:folHlink>
+    </a:clrScheme>
+    <a:fontScheme name="Office">
+      <a:majorFont>
+        <a:latin typeface="Aptos Display" panose="02110004020202020204"/>
+        <a:ea typeface=""/>
+        <a:cs typeface=""/>
+        <a:font script="Jpan" typeface="游ゴシック Light"/>
+        <a:font script="Hang" typeface="맑은 고딕"/>
+        <a:font script="Hans" typeface="等线 Light"/>
+        <a:font script="Hant" typeface="新細明體"/>
+        <a:font script="Arab" typeface="Times New Roman"/>
+        <a:font script="Hebr" typeface="Times New Roman"/>
+        <a:font script="Thai" typeface="Angsana New"/>
+        <a:font script="Ethi" typeface="Nyala"/>
+        <a:font script="Beng" typeface="Vrinda"/>
+        <a:font script="Gujr" typeface="Shruti"/>
+        <a:font script="Khmr" typeface="MoolBoran"/>
+        <a:font script="Knda" typeface="Tunga"/>
+        <a:font script="Guru" typeface="Raavi"/>
+        <a:font script="Cans" typeface="Euphemia"/>
+        <a:font script="Cher" typeface="Plantagenet Cherokee"/>
+        <a:font script="Yiii" typeface="Microsoft Yi Baiti"/>
+        <a:font script="Tibt" typeface="Microsoft Himalaya"/>
+        <a:font script="Thaa" typeface="MV Boli"/>
+        <a:font script="Deva" typeface="Mangal"/>
+        <a:font script="Telu" typeface="Gautami"/>
+        <a:font script="Taml" typeface="Latha"/>
+        <a:font script="Syrc" typeface="Estrangelo Edessa"/>
+        <a:font script="Orya" typeface="Kalinga"/>
+        <a:font script="Mlym" typeface="Kartika"/>
+        <a:font script="Laoo" typeface="DokChampa"/>
+        <a:font script="Sinh" typeface="Iskoola Pota"/>
+        <a:font script="Mong" typeface="Mongolian Baiti"/>
+        <a:font script="Viet" typeface="Times New Roman"/>
+        <a:font script="Uigh" typeface="Microsoft Uighur"/>
+        <a:font script="Geor" typeface="Sylfaen"/>
+        <a:font script="Armn" typeface="Arial"/>
+        <a:font script="Bugi" typeface="Leelawadee UI"/>
+        <a:font script="Bopo" typeface="Microsoft JhengHei"/>
+        <a:font script="Java" typeface="Javanese Text"/>
+        <a:font script="Lisu" typeface="Segoe UI"/>
+        <a:font script="Mymr" typeface="Myanmar Text"/>
+        <a:font script="Nkoo" typeface="Ebrima"/>
+        <a:font script="Olck" typeface="Nirmala UI"/>
+        <a:font script="Osma" typeface="Ebrima"/>
+        <a:font script="Phag" typeface="Phagspa"/>
+        <a:font script="Syrn" typeface="Estrangelo Edessa"/>
+        <a:font script="Syrj" typeface="Estrangelo Edessa"/>
+        <a:font script="Syre" typeface="Estrangelo Edessa"/>
+        <a:font script="Sora" typeface="Nirmala UI"/>
+        <a:font script="Tale" typeface="Microsoft Tai Le"/>
+        <a:font script="Talu" typeface="Microsoft New Tai Lue"/>
+        <a:font script="Tfng" typeface="Ebrima"/>
+      </a:majorFont>
+      <a:minorFont>
+        <a:latin typeface="Aptos" panose="02110004020202020204"/>
+        <a:ea typeface=""/>
+        <a:cs typeface=""/>
+        <a:font script="Jpan" typeface="游ゴシック"/>
+        <a:font script="Hang" typeface="맑은 고딕"/>
+        <a:font script="Hans" typeface="等线"/>
+        <a:font script="Hant" typeface="新細明體"/>
+        <a:font script="Arab" typeface="Arial"/>
+        <a:font script="Hebr" typeface="Arial"/>
+        <a:font script="Thai" typeface="Cordia New"/>
+        <a:font script="Ethi" typeface="Nyala"/>
+        <a:font script="Beng" typeface="Vrinda"/>
+        <a:font script="Gujr" typeface="Shruti"/>
+        <a:font script="Khmr" typeface="DaunPenh"/>
+        <a:font script="Knda" typeface="Tunga"/>
+        <a:font script="Guru" typeface="Raavi"/>
+        <a:font script="Cans" typeface="Euphemia"/>
+        <a:font script="Cher" typeface="Plantagenet Cherokee"/>
+        <a:font script="Yiii" typeface="Microsoft Yi Baiti"/>
+        <a:font script="Tibt" typeface="Microsoft Himalaya"/>
+        <a:font script="Thaa" typeface="MV Boli"/>
+        <a:font script="Deva" typeface="Mangal"/>
+        <a:font script="Telu" typeface="Gautami"/>
+        <a:font script="Taml" typeface="Latha"/>
+        <a:font script="Syrc" typeface="Estrangelo Edessa"/>
+        <a:font script="Orya" typeface="Kalinga"/>
+        <a:font script="Mlym" typeface="Kartika"/>
+        <a:font script="Laoo" typeface="DokChampa"/>
+        <a:font script="Sinh" typeface="Iskoola Pota"/>
+        <a:font script="Mong" typeface="Mongolian Baiti"/>
+        <a:font script="Viet" typeface="Arial"/>
+        <a:font script="Uigh" typeface="Microsoft Uighur"/>
+        <a:font script="Geor" typeface="Sylfaen"/>
+        <a:font script="Armn" typeface="Arial"/>
+        <a:font script="Bugi" typeface="Leelawadee UI"/>
+        <a:font script="Bopo" typeface="Microsoft JhengHei"/>
+        <a:font script="Java" typeface="Javanese Text"/>
+        <a:font script="Lisu" typeface="Segoe UI"/>
+        <a:font script="Mymr" typeface="Myanmar Text"/>
+        <a:font script="Nkoo" typeface="Ebrima"/>
+        <a:font script="Olck" typeface="Nirmala UI"/>
+        <a:font script="Osma" typeface="Ebrima"/>
+        <a:font script="Phag" typeface="Phagspa"/>
+        <a:font script="Syrn" typeface="Estrangelo Edessa"/>
+        <a:font script="Syrj" typeface="Estrangelo Edessa"/>
+        <a:font script="Syre" typeface="Estrangelo Edessa"/>
+        <a:font script="Sora" typeface="Nirmala UI"/>
+        <a:font script="Tale" typeface="Microsoft Tai Le"/>
+        <a:font script="Talu" typeface="Microsoft New Tai Lue"/>
+        <a:font script="Tfng" typeface="Ebrima"/>
+      </a:minorFont>
+    </a:fontScheme>
+    <a:fmtScheme name="Office">
+      <a:fillStyleLst>
+        <a:solidFill>
+          <a:schemeClr val="phClr"/>
+        </a:solidFill>
+        <a:gradFill rotWithShape="1">
+          <a:gsLst>
+            <a:gs pos="0">
+              <a:schemeClr val="phClr">
+                <a:lumMod val="110000"/>
+                <a:satMod val="105000"/>
+                <a:tint val="67000"/>
+              </a:schemeClr>
+            </a:gs>
+            <a:gs pos="50000">
+              <a:schemeClr val="phClr">
+                <a:lumMod val="105000"/>
+                <a:satMod val="103000"/>
+                <a:tint val="73000"/>
+              </a:schemeClr>
+            </a:gs>
+            <a:gs pos="100000">
+              <a:schemeClr val="phClr">
+                <a:lumMod val="105000"/>
+                <a:satMod val="109000"/>
+                <a:tint val="81000"/>
+              </a:schemeClr>
+            </a:gs>
+          </a:gsLst>
+          <a:lin ang="5400000" scaled="0"/>
+        </a:gradFill>
+        <a:gradFill rotWithShape="1">
+          <a:gsLst>
+            <a:gs pos="0">
+              <a:schemeClr val="phClr">
+                <a:satMod val="103000"/>
+                <a:lumMod val="102000"/>
+                <a:tint val="94000"/>
+              </a:schemeClr>
+            </a:gs>
+            <a:gs pos="50000">
+              <a:schemeClr val="phClr">
+                <a:satMod val="110000"/>
+                <a:lumMod val="100000"/>
+                <a:shade val="100000"/>
+              </a:schemeClr>
+            </a:gs>
+            <a:gs pos="100000">
+              <a:schemeClr val="phClr">
+                <a:lumMod val="99000"/>
+                <a:satMod val="120000"/>
+                <a:shade val="78000"/>
+              </a:schemeClr>
+            </a:gs>
+          </a:gsLst>
+          <a:lin ang="5400000" scaled="0"/>
+        </a:gradFill>
+      </a:fillStyleLst>
+      <a:lnStyleLst>
+        <a:ln w="12700" cap="flat" cmpd="sng" algn="ctr">
+          <a:solidFill>
+            <a:schemeClr val="phClr"/>
+          </a:solidFill>
+          <a:prstDash val="solid"/>
+          <a:miter lim="800000"/>
+        </a:ln>
+        <a:ln w="19050" cap="flat" cmpd="sng" algn="ctr">
+          <a:solidFill>
+            <a:schemeClr val="phClr"/>
+          </a:solidFill>
+          <a:prstDash val="solid"/>
+          <a:miter lim="800000"/>
+        </a:ln>
+        <a:ln w="25400" cap="flat" cmpd="sng" algn="ctr">
+          <a:solidFill>
+            <a:schemeClr val="phClr"/>
+          </a:solidFill>
+          <a:prstDash val="solid"/>
+          <a:miter lim="800000"/>
+        </a:ln>
+      </a:lnStyleLst>
+      <a:effectStyleLst>
+        <a:effectStyle>
+          <a:effectLst/>
+        </a:effectStyle>
+        <a:effectStyle>
+          <a:effectLst/>
+        </a:effectStyle>
+        <a:effectStyle>
+          <a:effectLst>
+            <a:outerShdw blurRad="57150" dist="19050" dir="5400000" algn="ctr" rotWithShape="0">
+              <a:srgbClr val="000000">
+                <a:alpha val="63000"/>
+              </a:srgbClr>
+            </a:outerShdw>
+          </a:effectLst>
+        </a:effectStyle>
+      </a:effectStyleLst>
+      <a:bgFillStyleLst>
+        <a:solidFill>
+          <a:schemeClr val="phClr"/>
+        </a:solidFill>
+        <a:solidFill>
+          <a:schemeClr val="phClr">
+            <a:tint val="95000"/>
+            <a:satMod val="170000"/>
+          </a:schemeClr>
+        </a:solidFill>
+        <a:gradFill rotWithShape="1">
+          <a:gsLst>
+            <a:gs pos="0">
+              <a:schemeClr val="phClr">
+                <a:tint val="93000"/>
+                <a:satMod val="150000"/>
+                <a:shade val="98000"/>
+                <a:lumMod val="102000"/>
+              </a:schemeClr>
+            </a:gs>
+            <a:gs pos="50000">
+              <a:schemeClr val="phClr">
+                <a:tint val="98000"/>
+                <a:satMod val="130000"/>
+                <a:shade val="90000"/>
+                <a:lumMod val="103000"/>
+              </a:schemeClr>
+            </a:gs>
+            <a:gs pos="100000">
+              <a:schemeClr val="phClr">
+                <a:shade val="63000"/>
+                <a:satMod val="120000"/>
+              </a:schemeClr>
+            </a:gs>
+          </a:gsLst>
+          <a:lin ang="5400000" scaled="0"/>
+        </a:gradFill>
+      </a:bgFillStyleLst>
+    </a:fmtScheme>
+  </a:themeElements>
+  <a:objectDefaults>
+    <a:lnDef>
+      <a:spPr/>
+      <a:bodyPr/>
+      <a:lstStyle/>
+      <a:style>
+        <a:lnRef idx="2">
+          <a:schemeClr val="accent1"/>
+        </a:lnRef>
+        <a:fillRef idx="0">
+          <a:schemeClr val="accent1"/>
+        </a:fillRef>
+        <a:effectRef idx="1">
+          <a:schemeClr val="accent1"/>
+        </a:effectRef>
+        <a:fontRef idx="minor">
+          <a:schemeClr val="tx1"/>
+        </a:fontRef>
+      </a:style>
+    </a:lnDef>
+  </a:objectDefaults>
+  <a:extraClrSchemeLst/>
+  <a:extLst>
+    <a:ext uri="{05A4C25C-085E-4340-85A3-A5531E510DB2}">
+      <thm15:themeFamily xmlns:thm15="http://schemas.microsoft.com/office/thememl/2012/main" name="Office Theme" id="{2E142A2C-CD16-42D6-873A-C26D2A0506FA}" vid="{1BDDFF52-6CD6-40A5-AB3C-68EB2F1E4D0A}"/>
+    </a:ext>
+  </a:extLst>
+</a:theme>
 </file>